--- a/presentation/slides.pptx
+++ b/presentation/slides.pptx
@@ -1,9 +1,12 @@
 
 <file path=ppt/presentation.xml><?xml version="1.0" encoding="utf-8"?>
-<p:presentation xmlns:a="http://schemas.openxmlformats.org/drawingml/2006/main" xmlns:r="http://schemas.openxmlformats.org/officeDocument/2006/relationships" xmlns:p="http://schemas.openxmlformats.org/presentationml/2006/main" saveSubsetFonts="true" autoCompressPictures="0" embedTrueTypeFonts="true">
+<p:presentation xmlns:a="http://schemas.openxmlformats.org/drawingml/2006/main" xmlns:r="http://schemas.openxmlformats.org/officeDocument/2006/relationships" xmlns:p="http://schemas.openxmlformats.org/presentationml/2006/main" embedTrueTypeFonts="1" saveSubsetFonts="1" autoCompressPictures="0">
   <p:sldMasterIdLst>
     <p:sldMasterId id="2147483648" r:id="rId1"/>
   </p:sldMasterIdLst>
+  <p:notesMasterIdLst>
+    <p:notesMasterId r:id="rId10"/>
+  </p:notesMasterIdLst>
   <p:sldIdLst>
     <p:sldId id="256" r:id="rId2"/>
     <p:sldId id="257" r:id="rId3"/>
@@ -14,19 +17,23 @@
     <p:sldId id="262" r:id="rId8"/>
     <p:sldId id="263" r:id="rId9"/>
   </p:sldIdLst>
-  <p:notesMasterIdLst>
-    <p:notesMasterId r:id="rId10"/>
-  </p:notesMasterIdLst>
-  <p:sldSz cx="12191695" cy="6858000"/>
-  <p:notesSz cx="6858000" cy="12191695"/>
+  <p:sldSz cx="12192000" cy="6858000"/>
+  <p:notesSz cx="6858000" cy="12192000"/>
   <p:embeddedFontLst>
     <p:embeddedFont>
-      <p:font typeface="Overpass"/>
-      <p:regular r:id="rId201314"/>
+      <p:font typeface="Consolas" panose="020B0609020204030204" pitchFamily="49" charset="0"/>
+      <p:regular r:id="rId11"/>
+      <p:bold r:id="rId12"/>
+      <p:italic r:id="rId13"/>
+      <p:boldItalic r:id="rId14"/>
     </p:embeddedFont>
     <p:embeddedFont>
-      <p:font typeface="Overpass Bold"/>
-      <p:regular r:id="rId201315"/>
+      <p:font typeface="Overpass" panose="020B0604020202020204" charset="0"/>
+      <p:regular r:id="rId15"/>
+    </p:embeddedFont>
+    <p:embeddedFont>
+      <p:font typeface="Overpass Bold" panose="020B0604020202020204" charset="0"/>
+      <p:regular r:id="rId16"/>
     </p:embeddedFont>
   </p:embeddedFontLst>
   <p:defaultTextStyle>
@@ -121,6 +128,11 @@
       </a:defRPr>
     </a:lvl9pPr>
   </p:defaultTextStyle>
+  <p:extLst>
+    <p:ext uri="{EFAFB233-063F-42B5-8137-9DF3F51BA10A}">
+      <p15:sldGuideLst xmlns:p15="http://schemas.microsoft.com/office/powerpoint/2012/main"/>
+    </p:ext>
+  </p:extLst>
 </p:presentation>
 </file>
 
@@ -146,234 +158,10 @@
           <a:chExt cx="0" cy="0"/>
         </a:xfrm>
       </p:grpSpPr>
-      <p:sp>
-        <p:nvSpPr>
-          <p:cNvPr id="2" name="Header Placeholder 1"/>
-          <p:cNvSpPr>
-            <a:spLocks noGrp="1"/>
-          </p:cNvSpPr>
-          <p:nvPr>
-            <p:ph type="hdr" sz="quarter"/>
-          </p:nvPr>
-        </p:nvSpPr>
-        <p:spPr>
-          <a:xfrm>
-            <a:off x="0" y="0"/>
-            <a:ext cx="2971800" cy="458788"/>
-          </a:xfrm>
-          <a:prstGeom prst="rect">
-            <a:avLst/>
-          </a:prstGeom>
-        </p:spPr>
-        <p:txBody>
-          <a:bodyPr vert="horz" lIns="91440" tIns="45720" rIns="91440" bIns="45720" rtlCol="0"/>
-          <a:lstStyle>
-            <a:lvl1pPr algn="l">
-              <a:defRPr sz="1200"/>
-            </a:lvl1pPr>
-          </a:lstStyle>
-          <a:p>
-            <a:endParaRPr lang="en-US"/>
-          </a:p>
-        </p:txBody>
-      </p:sp>
-      <p:sp>
-        <p:nvSpPr>
-          <p:cNvPr id="3" name="Date Placeholder 2"/>
-          <p:cNvSpPr>
-            <a:spLocks noGrp="1"/>
-          </p:cNvSpPr>
-          <p:nvPr>
-            <p:ph type="dt" idx="1"/>
-          </p:nvPr>
-        </p:nvSpPr>
-        <p:spPr>
-          <a:xfrm>
-            <a:off x="3884613" y="0"/>
-            <a:ext cx="2971800" cy="458788"/>
-          </a:xfrm>
-          <a:prstGeom prst="rect">
-            <a:avLst/>
-          </a:prstGeom>
-        </p:spPr>
-        <p:txBody>
-          <a:bodyPr vert="horz" lIns="91440" tIns="45720" rIns="91440" bIns="45720" rtlCol="0"/>
-          <a:lstStyle>
-            <a:lvl1pPr algn="r">
-              <a:defRPr sz="1200"/>
-            </a:lvl1pPr>
-          </a:lstStyle>
-          <a:p>
-            <a:fld id="{5282F153-3F37-0F45-9E97-73ACFA13230C}" type="datetimeFigureOut">
-              <a:rPr lang="en-US"/>
-              <a:t>7/23/19</a:t>
-            </a:fld>
-            <a:endParaRPr lang="en-US"/>
-          </a:p>
-        </p:txBody>
-      </p:sp>
-      <p:sp>
-        <p:nvSpPr>
-          <p:cNvPr id="4" name="Slide Image Placeholder 3"/>
-          <p:cNvSpPr>
-            <a:spLocks noGrp="1" noRot="1" noChangeAspect="1"/>
-          </p:cNvSpPr>
-          <p:nvPr>
-            <p:ph type="sldImg" idx="2"/>
-          </p:nvPr>
-        </p:nvSpPr>
-        <p:spPr>
-          <a:xfrm>
-            <a:off x="685800" y="1143000"/>
-            <a:ext cx="5486400" cy="3086100"/>
-          </a:xfrm>
-          <a:prstGeom prst="rect">
-            <a:avLst/>
-          </a:prstGeom>
-          <a:noFill/>
-          <a:ln w="12700">
-            <a:solidFill>
-              <a:prstClr val="black"/>
-            </a:solidFill>
-          </a:ln>
-        </p:spPr>
-        <p:txBody>
-          <a:bodyPr vert="horz" lIns="91440" tIns="45720" rIns="91440" bIns="45720" rtlCol="0" anchor="ctr"/>
-          <a:lstStyle/>
-          <a:p>
-            <a:endParaRPr lang="en-US"/>
-          </a:p>
-        </p:txBody>
-      </p:sp>
-      <p:sp>
-        <p:nvSpPr>
-          <p:cNvPr id="5" name="Notes Placeholder 4"/>
-          <p:cNvSpPr>
-            <a:spLocks noGrp="1"/>
-          </p:cNvSpPr>
-          <p:nvPr>
-            <p:ph type="body" sz="quarter" idx="3"/>
-          </p:nvPr>
-        </p:nvSpPr>
-        <p:spPr>
-          <a:xfrm>
-            <a:off x="685800" y="4400550"/>
-            <a:ext cx="5486400" cy="3600450"/>
-          </a:xfrm>
-          <a:prstGeom prst="rect">
-            <a:avLst/>
-          </a:prstGeom>
-        </p:spPr>
-        <p:txBody>
-          <a:bodyPr vert="horz" lIns="91440" tIns="45720" rIns="91440" bIns="45720" rtlCol="0"/>
-          <a:lstStyle/>
-          <a:p>
-            <a:pPr lvl="0"/>
-            <a:r>
-              <a:rPr lang="en-US"/>
-              <a:t>Click to edit Master text styles</a:t>
-            </a:r>
-          </a:p>
-          <a:p>
-            <a:pPr lvl="1"/>
-            <a:r>
-              <a:rPr lang="en-US"/>
-              <a:t>Second level</a:t>
-            </a:r>
-          </a:p>
-          <a:p>
-            <a:pPr lvl="2"/>
-            <a:r>
-              <a:rPr lang="en-US"/>
-              <a:t>Third level</a:t>
-            </a:r>
-          </a:p>
-          <a:p>
-            <a:pPr lvl="3"/>
-            <a:r>
-              <a:rPr lang="en-US"/>
-              <a:t>Fourth level</a:t>
-            </a:r>
-          </a:p>
-          <a:p>
-            <a:pPr lvl="4"/>
-            <a:r>
-              <a:rPr lang="en-US"/>
-              <a:t>Fifth level</a:t>
-            </a:r>
-          </a:p>
-        </p:txBody>
-      </p:sp>
-      <p:sp>
-        <p:nvSpPr>
-          <p:cNvPr id="6" name="Footer Placeholder 5"/>
-          <p:cNvSpPr>
-            <a:spLocks noGrp="1"/>
-          </p:cNvSpPr>
-          <p:nvPr>
-            <p:ph type="ftr" sz="quarter" idx="4"/>
-          </p:nvPr>
-        </p:nvSpPr>
-        <p:spPr>
-          <a:xfrm>
-            <a:off x="0" y="8685213"/>
-            <a:ext cx="2971800" cy="458787"/>
-          </a:xfrm>
-          <a:prstGeom prst="rect">
-            <a:avLst/>
-          </a:prstGeom>
-        </p:spPr>
-        <p:txBody>
-          <a:bodyPr vert="horz" lIns="91440" tIns="45720" rIns="91440" bIns="45720" rtlCol="0" anchor="b"/>
-          <a:lstStyle>
-            <a:lvl1pPr algn="l">
-              <a:defRPr sz="1200"/>
-            </a:lvl1pPr>
-          </a:lstStyle>
-          <a:p>
-            <a:endParaRPr lang="en-US"/>
-          </a:p>
-        </p:txBody>
-      </p:sp>
-      <p:sp>
-        <p:nvSpPr>
-          <p:cNvPr id="7" name="Slide Number Placeholder 6"/>
-          <p:cNvSpPr>
-            <a:spLocks noGrp="1"/>
-          </p:cNvSpPr>
-          <p:nvPr>
-            <p:ph type="sldNum" sz="quarter" idx="5"/>
-          </p:nvPr>
-        </p:nvSpPr>
-        <p:spPr>
-          <a:xfrm>
-            <a:off x="3884613" y="8685213"/>
-            <a:ext cx="2971800" cy="458787"/>
-          </a:xfrm>
-          <a:prstGeom prst="rect">
-            <a:avLst/>
-          </a:prstGeom>
-        </p:spPr>
-        <p:txBody>
-          <a:bodyPr vert="horz" lIns="91440" tIns="45720" rIns="91440" bIns="45720" rtlCol="0" anchor="b"/>
-          <a:lstStyle>
-            <a:lvl1pPr algn="r">
-              <a:defRPr sz="1200"/>
-            </a:lvl1pPr>
-          </a:lstStyle>
-          <a:p>
-            <a:fld id="{CE5E9CC1-C706-0F49-92D6-E571CC5EEA8F}" type="slidenum">
-              <a:rPr lang="en-US"/>
-              <a:t>‹#›</a:t>
-            </a:fld>
-            <a:endParaRPr lang="en-US"/>
-          </a:p>
-        </p:txBody>
-      </p:sp>
     </p:spTree>
     <p:extLst>
       <p:ext uri="{BB962C8B-B14F-4D97-AF65-F5344CB8AC3E}">
-        <p14:creationId xmlns:p14="http://schemas.microsoft.com/office/powerpoint/2010/main" val="1024086991"/>
+        <p14:creationId xmlns:p14="http://schemas.microsoft.com/office/powerpoint/2010/main" val="1425952402"/>
       </p:ext>
     </p:extLst>
   </p:cSld>
@@ -517,10 +305,6 @@
           <a:bodyPr/>
           <a:lstStyle/>
           <a:p>
-            <a:r>
-              <a:rPr lang="en-US" dirty="0"/>
-              <a:t/>
-            </a:r>
             <a:endParaRPr lang="en-US" dirty="0"/>
           </a:p>
         </p:txBody>
@@ -605,10 +389,6 @@
           <a:bodyPr/>
           <a:lstStyle/>
           <a:p>
-            <a:r>
-              <a:rPr lang="en-US" dirty="0"/>
-              <a:t/>
-            </a:r>
             <a:endParaRPr lang="en-US" dirty="0"/>
           </a:p>
         </p:txBody>
@@ -693,10 +473,6 @@
           <a:bodyPr/>
           <a:lstStyle/>
           <a:p>
-            <a:r>
-              <a:rPr lang="en-US" dirty="0"/>
-              <a:t/>
-            </a:r>
             <a:endParaRPr lang="en-US" dirty="0"/>
           </a:p>
         </p:txBody>
@@ -781,10 +557,6 @@
           <a:bodyPr/>
           <a:lstStyle/>
           <a:p>
-            <a:r>
-              <a:rPr lang="en-US" dirty="0"/>
-              <a:t/>
-            </a:r>
             <a:endParaRPr lang="en-US" dirty="0"/>
           </a:p>
         </p:txBody>
@@ -869,10 +641,6 @@
           <a:bodyPr/>
           <a:lstStyle/>
           <a:p>
-            <a:r>
-              <a:rPr lang="en-US" dirty="0"/>
-              <a:t/>
-            </a:r>
             <a:endParaRPr lang="en-US" dirty="0"/>
           </a:p>
         </p:txBody>
@@ -957,10 +725,6 @@
           <a:bodyPr/>
           <a:lstStyle/>
           <a:p>
-            <a:r>
-              <a:rPr lang="en-US" dirty="0"/>
-              <a:t/>
-            </a:r>
             <a:endParaRPr lang="en-US" dirty="0"/>
           </a:p>
         </p:txBody>
@@ -1045,10 +809,6 @@
           <a:bodyPr/>
           <a:lstStyle/>
           <a:p>
-            <a:r>
-              <a:rPr lang="en-US" dirty="0"/>
-              <a:t/>
-            </a:r>
             <a:endParaRPr lang="en-US" dirty="0"/>
           </a:p>
         </p:txBody>
@@ -1133,10 +893,6 @@
           <a:bodyPr/>
           <a:lstStyle/>
           <a:p>
-            <a:r>
-              <a:rPr lang="en-US" dirty="0"/>
-              <a:t/>
-            </a:r>
             <a:endParaRPr lang="en-US" dirty="0"/>
           </a:p>
         </p:txBody>
@@ -1226,14 +982,14 @@
       </p:grpSpPr>
       <p:pic>
         <p:nvPicPr>
-          <p:cNvPr id="2" name="Image 0" descr="preencoded.png">    </p:cNvPr>
+          <p:cNvPr id="2" name="Image 0" descr="preencoded.png"/>
           <p:cNvPicPr>
             <a:picLocks noChangeAspect="1"/>
           </p:cNvPicPr>
           <p:nvPr/>
         </p:nvPicPr>
         <p:blipFill>
-          <a:blip r:embed="rId1"/>
+          <a:blip r:embed="rId2"/>
           <a:stretch>
             <a:fillRect/>
           </a:stretch>
@@ -1273,7 +1029,7 @@
       <p:pic>
         <p:nvPicPr>
           <p:cNvPr id="4" name="Image 1" descr="preencoded.png">
-            <a:hlinkClick r:id="rId3" tooltip=""/>
+            <a:hlinkClick r:id="rId3"/>
           </p:cNvPr>
           <p:cNvPicPr>
             <a:picLocks noChangeAspect="1"/>
@@ -1281,7 +1037,7 @@
           <p:nvPr/>
         </p:nvPicPr>
         <p:blipFill>
-          <a:blip r:embed="rId2"/>
+          <a:blip r:embed="rId4"/>
           <a:stretch>
             <a:fillRect/>
           </a:stretch>
@@ -1307,6 +1063,11 @@
 <file path=ppt/slideMasters/slideMaster1.xml><?xml version="1.0" encoding="utf-8"?>
 <p:sldMaster xmlns:a="http://schemas.openxmlformats.org/drawingml/2006/main" xmlns:r="http://schemas.openxmlformats.org/officeDocument/2006/relationships" xmlns:p="http://schemas.openxmlformats.org/presentationml/2006/main">
   <p:cSld>
+    <p:bg>
+      <p:bgRef idx="1001">
+        <a:schemeClr val="bg1"/>
+      </p:bgRef>
+    </p:bg>
     <p:spTree>
       <p:nvGrpSpPr>
         <p:cNvPr id="1" name=""/>
@@ -1601,14 +1362,14 @@
       </p:grpSpPr>
       <p:pic>
         <p:nvPicPr>
-          <p:cNvPr id="2" name="Image 0" descr="preencoded.png">    </p:cNvPr>
+          <p:cNvPr id="2" name="Image 0" descr="preencoded.png"/>
           <p:cNvPicPr>
             <a:picLocks noChangeAspect="1"/>
           </p:cNvPicPr>
           <p:nvPr/>
         </p:nvPicPr>
         <p:blipFill>
-          <a:blip r:embed="rId1"/>
+          <a:blip r:embed="rId3"/>
           <a:stretch>
             <a:fillRect/>
           </a:stretch>
@@ -1644,14 +1405,14 @@
           <a:bodyPr wrap="none" lIns="0" tIns="0" rIns="0" bIns="0" rtlCol="0" anchor="t"/>
           <a:lstStyle/>
           <a:p>
-            <a:pPr algn="l" indent="0" marL="0">
+            <a:pPr marL="0" indent="0" algn="l">
               <a:lnSpc>
                 <a:spcPct val="104000"/>
               </a:lnSpc>
               <a:buNone/>
             </a:pPr>
             <a:r>
-              <a:rPr lang="en-US" sz="3650" b="1" spc="-111" kern="0" dirty="0">
+              <a:rPr lang="en-US" sz="3650" b="1" kern="0" spc="-111" dirty="0">
                 <a:solidFill>
                   <a:srgbClr val="FFFFFF"/>
                 </a:solidFill>
@@ -1688,7 +1449,7 @@
           </a:bodyPr>
           <a:lstStyle/>
           <a:p>
-            <a:pPr algn="l" indent="0" marL="0">
+            <a:pPr marL="0" indent="0" algn="l">
               <a:lnSpc>
                 <a:spcPct val="133000"/>
               </a:lnSpc>
@@ -1752,7 +1513,7 @@
           <a:bodyPr wrap="none" lIns="0" tIns="0" rIns="0" bIns="0" rtlCol="0" anchor="t"/>
           <a:lstStyle/>
           <a:p>
-            <a:pPr algn="l" indent="0" marL="0">
+            <a:pPr marL="0" indent="0" algn="l">
               <a:lnSpc>
                 <a:spcPct val="96000"/>
               </a:lnSpc>
@@ -1819,7 +1580,7 @@
           <a:bodyPr wrap="none" lIns="0" tIns="0" rIns="0" bIns="0" rtlCol="0" anchor="t"/>
           <a:lstStyle/>
           <a:p>
-            <a:pPr algn="l" indent="0" marL="0">
+            <a:pPr marL="0" indent="0" algn="l">
               <a:lnSpc>
                 <a:spcPct val="96000"/>
               </a:lnSpc>
@@ -1867,14 +1628,14 @@
       </p:grpSpPr>
       <p:pic>
         <p:nvPicPr>
-          <p:cNvPr id="2" name="Image 0" descr="preencoded.png">    </p:cNvPr>
+          <p:cNvPr id="2" name="Image 0" descr="preencoded.png"/>
           <p:cNvPicPr>
             <a:picLocks noChangeAspect="1"/>
           </p:cNvPicPr>
           <p:nvPr/>
         </p:nvPicPr>
         <p:blipFill>
-          <a:blip r:embed="rId1"/>
+          <a:blip r:embed="rId3"/>
           <a:stretch>
             <a:fillRect/>
           </a:stretch>
@@ -1912,14 +1673,14 @@
           </a:bodyPr>
           <a:lstStyle/>
           <a:p>
-            <a:pPr algn="l" indent="0" marL="0">
+            <a:pPr marL="0" indent="0" algn="l">
               <a:lnSpc>
                 <a:spcPct val="104000"/>
               </a:lnSpc>
               <a:buNone/>
             </a:pPr>
             <a:r>
-              <a:rPr lang="en-US" sz="3300" b="1" spc="-100" kern="0" dirty="0">
+              <a:rPr lang="en-US" sz="3300" b="1" kern="0" spc="-100" dirty="0">
                 <a:solidFill>
                   <a:srgbClr val="FFFFFF"/>
                 </a:solidFill>
@@ -1983,14 +1744,14 @@
           </a:bodyPr>
           <a:lstStyle/>
           <a:p>
-            <a:pPr algn="l" indent="0" marL="0">
+            <a:pPr marL="0" indent="0" algn="l">
               <a:lnSpc>
                 <a:spcPct val="104000"/>
               </a:lnSpc>
               <a:buNone/>
             </a:pPr>
             <a:r>
-              <a:rPr lang="en-US" sz="1650" b="1" spc="-50" kern="0" dirty="0">
+              <a:rPr lang="en-US" sz="1650" b="1" kern="0" spc="-50" dirty="0">
                 <a:solidFill>
                   <a:srgbClr val="E5E0DF"/>
                 </a:solidFill>
@@ -2027,7 +1788,7 @@
           </a:bodyPr>
           <a:lstStyle/>
           <a:p>
-            <a:pPr algn="l" indent="0" marL="0">
+            <a:pPr marL="0" indent="0" algn="l">
               <a:lnSpc>
                 <a:spcPct val="127000"/>
               </a:lnSpc>
@@ -2096,14 +1857,14 @@
           <a:bodyPr wrap="none" lIns="0" tIns="0" rIns="0" bIns="0" rtlCol="0" anchor="t"/>
           <a:lstStyle/>
           <a:p>
-            <a:pPr algn="l" indent="0" marL="0">
+            <a:pPr marL="0" indent="0" algn="l">
               <a:lnSpc>
                 <a:spcPct val="104000"/>
               </a:lnSpc>
               <a:buNone/>
             </a:pPr>
             <a:r>
-              <a:rPr lang="en-US" sz="1650" b="1" spc="-50" kern="0" dirty="0">
+              <a:rPr lang="en-US" sz="1650" b="1" kern="0" spc="-50" dirty="0">
                 <a:solidFill>
                   <a:srgbClr val="E5E0DF"/>
                 </a:solidFill>
@@ -2140,7 +1901,7 @@
           </a:bodyPr>
           <a:lstStyle/>
           <a:p>
-            <a:pPr algn="l" indent="0" marL="0">
+            <a:pPr marL="0" indent="0" algn="l">
               <a:lnSpc>
                 <a:spcPct val="127000"/>
               </a:lnSpc>
@@ -2209,14 +1970,14 @@
           <a:bodyPr wrap="none" lIns="0" tIns="0" rIns="0" bIns="0" rtlCol="0" anchor="t"/>
           <a:lstStyle/>
           <a:p>
-            <a:pPr algn="l" indent="0" marL="0">
+            <a:pPr marL="0" indent="0" algn="l">
               <a:lnSpc>
                 <a:spcPct val="104000"/>
               </a:lnSpc>
               <a:buNone/>
             </a:pPr>
             <a:r>
-              <a:rPr lang="en-US" sz="1650" b="1" spc="-50" kern="0" dirty="0">
+              <a:rPr lang="en-US" sz="1650" b="1" kern="0" spc="-50" dirty="0">
                 <a:solidFill>
                   <a:srgbClr val="E5E0DF"/>
                 </a:solidFill>
@@ -2253,7 +2014,7 @@
           </a:bodyPr>
           <a:lstStyle/>
           <a:p>
-            <a:pPr algn="l" indent="0" marL="0">
+            <a:pPr marL="0" indent="0" algn="l">
               <a:lnSpc>
                 <a:spcPct val="127000"/>
               </a:lnSpc>
@@ -2298,14 +2059,14 @@
       </p:sp>
       <p:pic>
         <p:nvPicPr>
-          <p:cNvPr id="14" name="Image 1" descr="preencoded.png">    </p:cNvPr>
+          <p:cNvPr id="14" name="Image 1" descr="preencoded.png"/>
           <p:cNvPicPr>
             <a:picLocks noChangeAspect="1"/>
           </p:cNvPicPr>
           <p:nvPr/>
         </p:nvPicPr>
         <p:blipFill>
-          <a:blip r:embed="rId2"/>
+          <a:blip r:embed="rId4"/>
           <a:stretch>
             <a:fillRect/>
           </a:stretch>
@@ -2343,7 +2104,7 @@
           </a:bodyPr>
           <a:lstStyle/>
           <a:p>
-            <a:pPr algn="l" indent="0" marL="0">
+            <a:pPr marL="0" indent="0" algn="l">
               <a:lnSpc>
                 <a:spcPct val="127000"/>
               </a:lnSpc>
@@ -2360,12 +2121,6 @@
               </a:rPr>
               <a:t>Impact:</a:t>
             </a:r>
-            <a:pPr algn="l" indent="0" marL="0">
-              <a:lnSpc>
-                <a:spcPct val="127000"/>
-              </a:lnSpc>
-              <a:buNone/>
-            </a:pPr>
             <a:r>
               <a:rPr lang="en-US" sz="1400" dirty="0">
                 <a:solidFill>
@@ -2427,14 +2182,14 @@
           <a:bodyPr wrap="none" lIns="0" tIns="0" rIns="0" bIns="0" rtlCol="0" anchor="t"/>
           <a:lstStyle/>
           <a:p>
-            <a:pPr algn="l" indent="0" marL="0">
+            <a:pPr marL="0" indent="0" algn="l">
               <a:lnSpc>
                 <a:spcPct val="104000"/>
               </a:lnSpc>
               <a:buNone/>
             </a:pPr>
             <a:r>
-              <a:rPr lang="en-US" sz="3050" b="1" spc="-92" kern="0" dirty="0">
+              <a:rPr lang="en-US" sz="3050" b="1" kern="0" spc="-92" dirty="0">
                 <a:solidFill>
                   <a:srgbClr val="FFFFFF"/>
                 </a:solidFill>
@@ -2471,7 +2226,7 @@
           </a:bodyPr>
           <a:lstStyle/>
           <a:p>
-            <a:pPr algn="l" indent="0" marL="0">
+            <a:pPr marL="0" indent="0" algn="l">
               <a:lnSpc>
                 <a:spcPct val="122000"/>
               </a:lnSpc>
@@ -2494,14 +2249,14 @@
       </p:sp>
       <p:pic>
         <p:nvPicPr>
-          <p:cNvPr id="4" name="Image 0" descr="preencoded.png">    </p:cNvPr>
+          <p:cNvPr id="4" name="Image 0" descr="preencoded.png"/>
           <p:cNvPicPr>
             <a:picLocks noChangeAspect="1"/>
           </p:cNvPicPr>
           <p:nvPr/>
         </p:nvPicPr>
         <p:blipFill>
-          <a:blip r:embed="rId1"/>
+          <a:blip r:embed="rId3"/>
           <a:stretch>
             <a:fillRect/>
           </a:stretch>
@@ -2537,14 +2292,14 @@
           <a:bodyPr wrap="none" lIns="0" tIns="0" rIns="0" bIns="0" rtlCol="0" anchor="t"/>
           <a:lstStyle/>
           <a:p>
-            <a:pPr algn="ctr" indent="0" marL="0">
+            <a:pPr marL="0" indent="0" algn="ctr">
               <a:lnSpc>
                 <a:spcPct val="104000"/>
               </a:lnSpc>
               <a:buNone/>
             </a:pPr>
             <a:r>
-              <a:rPr lang="en-US" sz="1800" b="1" spc="-54" kern="0" dirty="0">
+              <a:rPr lang="en-US" sz="1800" b="1" kern="0" spc="-54" dirty="0">
                 <a:solidFill>
                   <a:srgbClr val="E5E0DF"/>
                 </a:solidFill>
@@ -2579,14 +2334,14 @@
           <a:bodyPr wrap="none" lIns="0" tIns="0" rIns="0" bIns="0" rtlCol="0" anchor="t"/>
           <a:lstStyle/>
           <a:p>
-            <a:pPr algn="ctr" indent="0" marL="0">
+            <a:pPr marL="0" indent="0" algn="ctr">
               <a:lnSpc>
                 <a:spcPct val="104000"/>
               </a:lnSpc>
               <a:buNone/>
             </a:pPr>
             <a:r>
-              <a:rPr lang="en-US" sz="1800" b="1" spc="-54" kern="0" dirty="0">
+              <a:rPr lang="en-US" sz="1800" b="1" kern="0" spc="-54" dirty="0">
                 <a:solidFill>
                   <a:srgbClr val="E5E0DF"/>
                 </a:solidFill>
@@ -2623,14 +2378,14 @@
           </a:bodyPr>
           <a:lstStyle/>
           <a:p>
-            <a:pPr algn="ctr" indent="0" marL="0">
+            <a:pPr marL="0" indent="0" algn="ctr">
               <a:lnSpc>
                 <a:spcPct val="104000"/>
               </a:lnSpc>
               <a:buNone/>
             </a:pPr>
             <a:r>
-              <a:rPr lang="en-US" sz="1800" b="1" spc="-54" kern="0" dirty="0">
+              <a:rPr lang="en-US" sz="1800" b="1" kern="0" spc="-54" dirty="0">
                 <a:solidFill>
                   <a:srgbClr val="E5E0DF"/>
                 </a:solidFill>
@@ -2665,14 +2420,14 @@
           <a:bodyPr wrap="none" lIns="0" tIns="0" rIns="0" bIns="0" rtlCol="0" anchor="t"/>
           <a:lstStyle/>
           <a:p>
-            <a:pPr algn="ctr" indent="0" marL="0">
+            <a:pPr marL="0" indent="0" algn="ctr">
               <a:lnSpc>
                 <a:spcPct val="104000"/>
               </a:lnSpc>
               <a:buNone/>
             </a:pPr>
             <a:r>
-              <a:rPr lang="en-US" sz="1800" b="1" spc="-54" kern="0" dirty="0">
+              <a:rPr lang="en-US" sz="1800" b="1" kern="0" spc="-54" dirty="0">
                 <a:solidFill>
                   <a:srgbClr val="E5E0DF"/>
                 </a:solidFill>
@@ -2707,14 +2462,14 @@
           <a:bodyPr wrap="none" lIns="0" tIns="0" rIns="0" bIns="0" rtlCol="0" anchor="t"/>
           <a:lstStyle/>
           <a:p>
-            <a:pPr algn="ctr" indent="0" marL="0">
+            <a:pPr marL="0" indent="0" algn="ctr">
               <a:lnSpc>
                 <a:spcPct val="104000"/>
               </a:lnSpc>
               <a:buNone/>
             </a:pPr>
             <a:r>
-              <a:rPr lang="en-US" sz="1800" b="1" spc="-54" kern="0" dirty="0">
+              <a:rPr lang="en-US" sz="1800" b="1" kern="0" spc="-54" dirty="0">
                 <a:solidFill>
                   <a:srgbClr val="E5E0DF"/>
                 </a:solidFill>
@@ -2749,7 +2504,7 @@
           <a:bodyPr wrap="none" lIns="0" tIns="0" rIns="0" bIns="0" rtlCol="0" anchor="t"/>
           <a:lstStyle/>
           <a:p>
-            <a:pPr algn="l" indent="0" marL="0">
+            <a:pPr marL="0" indent="0" algn="l">
               <a:lnSpc>
                 <a:spcPct val="122000"/>
               </a:lnSpc>
@@ -2816,14 +2571,14 @@
           <a:bodyPr wrap="none" lIns="0" tIns="0" rIns="0" bIns="0" rtlCol="0" anchor="t"/>
           <a:lstStyle/>
           <a:p>
-            <a:pPr algn="l" indent="0" marL="0">
+            <a:pPr marL="0" indent="0" algn="l">
               <a:lnSpc>
                 <a:spcPct val="104000"/>
               </a:lnSpc>
               <a:buNone/>
             </a:pPr>
             <a:r>
-              <a:rPr lang="en-US" sz="1800" b="1" spc="-55" kern="0" dirty="0">
+              <a:rPr lang="en-US" sz="1800" b="1" kern="0" spc="-55" dirty="0">
                 <a:solidFill>
                   <a:srgbClr val="FFFFFF"/>
                 </a:solidFill>
@@ -2860,7 +2615,7 @@
           </a:bodyPr>
           <a:lstStyle/>
           <a:p>
-            <a:pPr algn="l" indent="0" marL="0">
+            <a:pPr marL="0" indent="0" algn="l">
               <a:lnSpc>
                 <a:spcPct val="100000"/>
               </a:lnSpc>
@@ -2877,12 +2632,6 @@
               </a:rPr>
               <a:t>The pipeline is orchestrated through a </a:t>
             </a:r>
-            <a:pPr algn="l" indent="0" marL="0">
-              <a:lnSpc>
-                <a:spcPct val="100000"/>
-              </a:lnSpc>
-              <a:buNone/>
-            </a:pPr>
             <a:r>
               <a:rPr lang="en-US" sz="750" b="1" dirty="0">
                 <a:solidFill>
@@ -2894,12 +2643,6 @@
               </a:rPr>
               <a:t>FastAPI backend</a:t>
             </a:r>
-            <a:pPr algn="l" indent="0" marL="0">
-              <a:lnSpc>
-                <a:spcPct val="100000"/>
-              </a:lnSpc>
-              <a:buNone/>
-            </a:pPr>
             <a:r>
               <a:rPr lang="en-US" sz="750" dirty="0">
                 <a:solidFill>
@@ -2911,12 +2654,6 @@
               </a:rPr>
               <a:t> (</a:t>
             </a:r>
-            <a:pPr algn="l" indent="0" marL="0">
-              <a:lnSpc>
-                <a:spcPct val="100000"/>
-              </a:lnSpc>
-              <a:buNone/>
-            </a:pPr>
             <a:r>
               <a:rPr lang="en-US" sz="750" dirty="0">
                 <a:solidFill>
@@ -2931,12 +2668,6 @@
               </a:rPr>
               <a:t>app.py</a:t>
             </a:r>
-            <a:pPr algn="l" indent="0" marL="0">
-              <a:lnSpc>
-                <a:spcPct val="100000"/>
-              </a:lnSpc>
-              <a:buNone/>
-            </a:pPr>
             <a:r>
               <a:rPr lang="en-US" sz="750" dirty="0">
                 <a:solidFill>
@@ -2954,14 +2685,14 @@
       </p:sp>
       <p:pic>
         <p:nvPicPr>
-          <p:cNvPr id="4" name="Image 0" descr="preencoded.png">    </p:cNvPr>
+          <p:cNvPr id="4" name="Image 0" descr="preencoded.png"/>
           <p:cNvPicPr>
             <a:picLocks noChangeAspect="1"/>
           </p:cNvPicPr>
           <p:nvPr/>
         </p:nvPicPr>
         <p:blipFill>
-          <a:blip r:embed="rId1"/>
+          <a:blip r:embed="rId3"/>
           <a:stretch>
             <a:fillRect/>
           </a:stretch>
@@ -2978,17 +2709,17 @@
       </p:pic>
       <p:pic>
         <p:nvPicPr>
-          <p:cNvPr id="5" name="Image 1" descr="preencoded.png">    </p:cNvPr>
+          <p:cNvPr id="5" name="Image 1" descr="preencoded.png"/>
           <p:cNvPicPr>
             <a:picLocks noChangeAspect="1"/>
           </p:cNvPicPr>
           <p:nvPr/>
         </p:nvPicPr>
         <p:blipFill>
-          <a:blip r:embed="rId2">
+          <a:blip>
             <a:extLst>
               <a:ext uri="{96DAC541-7B7A-43D3-8B79-37D633B846F1}">
-                <asvg:svgBlip xmlns:asvg="http://schemas.microsoft.com/office/drawing/2016/SVG/main" r:embed="rId3"/>
+                <asvg:svgBlip xmlns:asvg="http://schemas.microsoft.com/office/drawing/2016/SVG/main" r:embed="rId4"/>
               </a:ext>
             </a:extLst>
           </a:blip>
@@ -3027,14 +2758,14 @@
           <a:bodyPr wrap="none" lIns="0" tIns="0" rIns="0" bIns="0" rtlCol="0" anchor="t"/>
           <a:lstStyle/>
           <a:p>
-            <a:pPr algn="l" indent="0" marL="0">
+            <a:pPr marL="0" indent="0" algn="l">
               <a:lnSpc>
                 <a:spcPct val="104000"/>
               </a:lnSpc>
               <a:buNone/>
             </a:pPr>
             <a:r>
-              <a:rPr lang="en-US" sz="900" b="1" spc="-28" kern="0" dirty="0">
+              <a:rPr lang="en-US" sz="900" b="1" kern="0" spc="-28" dirty="0">
                 <a:solidFill>
                   <a:srgbClr val="E5E0DF"/>
                 </a:solidFill>
@@ -3069,7 +2800,7 @@
           <a:bodyPr wrap="none" lIns="0" tIns="0" rIns="0" bIns="0" rtlCol="0" anchor="t"/>
           <a:lstStyle/>
           <a:p>
-            <a:pPr algn="l" indent="0" marL="0">
+            <a:pPr marL="0" indent="0" algn="l">
               <a:lnSpc>
                 <a:spcPct val="100000"/>
               </a:lnSpc>
@@ -3092,17 +2823,17 @@
       </p:sp>
       <p:pic>
         <p:nvPicPr>
-          <p:cNvPr id="8" name="Image 2" descr="preencoded.png">    </p:cNvPr>
+          <p:cNvPr id="8" name="Image 2" descr="preencoded.png"/>
           <p:cNvPicPr>
             <a:picLocks noChangeAspect="1"/>
           </p:cNvPicPr>
           <p:nvPr/>
         </p:nvPicPr>
         <p:blipFill>
-          <a:blip r:embed="rId4">
+          <a:blip>
             <a:extLst>
               <a:ext uri="{96DAC541-7B7A-43D3-8B79-37D633B846F1}">
-                <asvg:svgBlip xmlns:asvg="http://schemas.microsoft.com/office/drawing/2016/SVG/main" r:embed="rId5"/>
+                <asvg:svgBlip xmlns:asvg="http://schemas.microsoft.com/office/drawing/2016/SVG/main" r:embed="rId4"/>
               </a:ext>
             </a:extLst>
           </a:blip>
@@ -3141,14 +2872,14 @@
           <a:bodyPr wrap="none" lIns="0" tIns="0" rIns="0" bIns="0" rtlCol="0" anchor="t"/>
           <a:lstStyle/>
           <a:p>
-            <a:pPr algn="l" indent="0" marL="0">
+            <a:pPr marL="0" indent="0" algn="l">
               <a:lnSpc>
                 <a:spcPct val="104000"/>
               </a:lnSpc>
               <a:buNone/>
             </a:pPr>
             <a:r>
-              <a:rPr lang="en-US" sz="900" b="1" spc="-28" kern="0" dirty="0">
+              <a:rPr lang="en-US" sz="900" b="1" kern="0" spc="-28" dirty="0">
                 <a:solidFill>
                   <a:srgbClr val="E5E0DF"/>
                 </a:solidFill>
@@ -3183,7 +2914,7 @@
           <a:bodyPr wrap="none" lIns="0" tIns="0" rIns="0" bIns="0" rtlCol="0" anchor="t"/>
           <a:lstStyle/>
           <a:p>
-            <a:pPr algn="l" indent="0" marL="0">
+            <a:pPr marL="0" indent="0" algn="l">
               <a:lnSpc>
                 <a:spcPct val="100000"/>
               </a:lnSpc>
@@ -3206,17 +2937,17 @@
       </p:sp>
       <p:pic>
         <p:nvPicPr>
-          <p:cNvPr id="11" name="Image 3" descr="preencoded.png">    </p:cNvPr>
+          <p:cNvPr id="11" name="Image 3" descr="preencoded.png"/>
           <p:cNvPicPr>
             <a:picLocks noChangeAspect="1"/>
           </p:cNvPicPr>
           <p:nvPr/>
         </p:nvPicPr>
         <p:blipFill>
-          <a:blip r:embed="rId6">
+          <a:blip>
             <a:extLst>
               <a:ext uri="{96DAC541-7B7A-43D3-8B79-37D633B846F1}">
-                <asvg:svgBlip xmlns:asvg="http://schemas.microsoft.com/office/drawing/2016/SVG/main" r:embed="rId7"/>
+                <asvg:svgBlip xmlns:asvg="http://schemas.microsoft.com/office/drawing/2016/SVG/main" r:embed="rId4"/>
               </a:ext>
             </a:extLst>
           </a:blip>
@@ -3255,14 +2986,14 @@
           <a:bodyPr wrap="none" lIns="0" tIns="0" rIns="0" bIns="0" rtlCol="0" anchor="t"/>
           <a:lstStyle/>
           <a:p>
-            <a:pPr algn="l" indent="0" marL="0">
+            <a:pPr marL="0" indent="0" algn="l">
               <a:lnSpc>
                 <a:spcPct val="104000"/>
               </a:lnSpc>
               <a:buNone/>
             </a:pPr>
             <a:r>
-              <a:rPr lang="en-US" sz="900" b="1" spc="-28" kern="0" dirty="0">
+              <a:rPr lang="en-US" sz="900" b="1" kern="0" spc="-28" dirty="0">
                 <a:solidFill>
                   <a:srgbClr val="E5E0DF"/>
                 </a:solidFill>
@@ -3297,7 +3028,7 @@
           <a:bodyPr wrap="none" lIns="0" tIns="0" rIns="0" bIns="0" rtlCol="0" anchor="t"/>
           <a:lstStyle/>
           <a:p>
-            <a:pPr algn="l" indent="0" marL="0">
+            <a:pPr marL="0" indent="0" algn="l">
               <a:lnSpc>
                 <a:spcPct val="100000"/>
               </a:lnSpc>
@@ -3317,12 +3048,6 @@
               </a:rPr>
               <a:t>bob_integration.py</a:t>
             </a:r>
-            <a:pPr algn="l" indent="0" marL="0">
-              <a:lnSpc>
-                <a:spcPct val="100000"/>
-              </a:lnSpc>
-              <a:buNone/>
-            </a:pPr>
             <a:r>
               <a:rPr lang="en-US" sz="750" dirty="0">
                 <a:solidFill>
@@ -3384,14 +3109,14 @@
           <a:bodyPr wrap="none" lIns="0" tIns="0" rIns="0" bIns="0" rtlCol="0" anchor="t"/>
           <a:lstStyle/>
           <a:p>
-            <a:pPr algn="l" indent="0" marL="0">
+            <a:pPr marL="0" indent="0" algn="l">
               <a:lnSpc>
                 <a:spcPct val="104000"/>
               </a:lnSpc>
               <a:buNone/>
             </a:pPr>
             <a:r>
-              <a:rPr lang="en-US" sz="2800" b="1" spc="-85" kern="0" dirty="0">
+              <a:rPr lang="en-US" sz="2800" b="1" kern="0" spc="-85" dirty="0">
                 <a:solidFill>
                   <a:srgbClr val="FFFFFF"/>
                 </a:solidFill>
@@ -3453,14 +3178,14 @@
           <a:bodyPr wrap="none" lIns="0" tIns="0" rIns="0" bIns="0" rtlCol="0" anchor="ctr"/>
           <a:lstStyle/>
           <a:p>
-            <a:pPr algn="ctr" indent="0" marL="0">
+            <a:pPr marL="0" indent="0" algn="ctr">
               <a:lnSpc>
                 <a:spcPct val="100000"/>
               </a:lnSpc>
               <a:buNone/>
             </a:pPr>
             <a:r>
-              <a:rPr lang="en-US" sz="1800" b="1" spc="-54" kern="0" dirty="0">
+              <a:rPr lang="en-US" sz="1800" b="1" kern="0" spc="-54" dirty="0">
                 <a:solidFill>
                   <a:srgbClr val="E5E0DF"/>
                 </a:solidFill>
@@ -3495,14 +3220,14 @@
           <a:bodyPr wrap="none" lIns="0" tIns="0" rIns="0" bIns="0" rtlCol="0" anchor="t"/>
           <a:lstStyle/>
           <a:p>
-            <a:pPr algn="l" indent="0" marL="0">
+            <a:pPr marL="0" indent="0" algn="l">
               <a:lnSpc>
                 <a:spcPct val="104000"/>
               </a:lnSpc>
               <a:buNone/>
             </a:pPr>
             <a:r>
-              <a:rPr lang="en-US" sz="1400" b="1" spc="-42" kern="0" dirty="0">
+              <a:rPr lang="en-US" sz="1400" b="1" kern="0" spc="-42" dirty="0">
                 <a:solidFill>
                   <a:srgbClr val="E5E0DF"/>
                 </a:solidFill>
@@ -3537,7 +3262,7 @@
           <a:bodyPr wrap="none" lIns="0" tIns="0" rIns="0" bIns="0" rtlCol="0" anchor="t"/>
           <a:lstStyle/>
           <a:p>
-            <a:pPr algn="l" indent="0" marL="0">
+            <a:pPr marL="0" indent="0" algn="l">
               <a:lnSpc>
                 <a:spcPct val="118000"/>
               </a:lnSpc>
@@ -3606,14 +3331,14 @@
           <a:bodyPr wrap="none" lIns="0" tIns="0" rIns="0" bIns="0" rtlCol="0" anchor="ctr"/>
           <a:lstStyle/>
           <a:p>
-            <a:pPr algn="ctr" indent="0" marL="0">
+            <a:pPr marL="0" indent="0" algn="ctr">
               <a:lnSpc>
                 <a:spcPct val="100000"/>
               </a:lnSpc>
               <a:buNone/>
             </a:pPr>
             <a:r>
-              <a:rPr lang="en-US" sz="1800" b="1" spc="-54" kern="0" dirty="0">
+              <a:rPr lang="en-US" sz="1800" b="1" kern="0" spc="-54" dirty="0">
                 <a:solidFill>
                   <a:srgbClr val="E5E0DF"/>
                 </a:solidFill>
@@ -3648,14 +3373,14 @@
           <a:bodyPr wrap="none" lIns="0" tIns="0" rIns="0" bIns="0" rtlCol="0" anchor="t"/>
           <a:lstStyle/>
           <a:p>
-            <a:pPr algn="l" indent="0" marL="0">
+            <a:pPr marL="0" indent="0" algn="l">
               <a:lnSpc>
                 <a:spcPct val="104000"/>
               </a:lnSpc>
               <a:buNone/>
             </a:pPr>
             <a:r>
-              <a:rPr lang="en-US" sz="1400" b="1" spc="-42" kern="0" dirty="0">
+              <a:rPr lang="en-US" sz="1400" b="1" kern="0" spc="-42" dirty="0">
                 <a:solidFill>
                   <a:srgbClr val="E5E0DF"/>
                 </a:solidFill>
@@ -3690,7 +3415,7 @@
           <a:bodyPr wrap="none" lIns="0" tIns="0" rIns="0" bIns="0" rtlCol="0" anchor="t"/>
           <a:lstStyle/>
           <a:p>
-            <a:pPr algn="l" indent="0" marL="0">
+            <a:pPr marL="0" indent="0" algn="l">
               <a:lnSpc>
                 <a:spcPct val="118000"/>
               </a:lnSpc>
@@ -3759,14 +3484,14 @@
           <a:bodyPr wrap="none" lIns="0" tIns="0" rIns="0" bIns="0" rtlCol="0" anchor="ctr"/>
           <a:lstStyle/>
           <a:p>
-            <a:pPr algn="ctr" indent="0" marL="0">
+            <a:pPr marL="0" indent="0" algn="ctr">
               <a:lnSpc>
                 <a:spcPct val="100000"/>
               </a:lnSpc>
               <a:buNone/>
             </a:pPr>
             <a:r>
-              <a:rPr lang="en-US" sz="1800" b="1" spc="-54" kern="0" dirty="0">
+              <a:rPr lang="en-US" sz="1800" b="1" kern="0" spc="-54" dirty="0">
                 <a:solidFill>
                   <a:srgbClr val="E5E0DF"/>
                 </a:solidFill>
@@ -3801,14 +3526,14 @@
           <a:bodyPr wrap="none" lIns="0" tIns="0" rIns="0" bIns="0" rtlCol="0" anchor="t"/>
           <a:lstStyle/>
           <a:p>
-            <a:pPr algn="l" indent="0" marL="0">
+            <a:pPr marL="0" indent="0" algn="l">
               <a:lnSpc>
                 <a:spcPct val="104000"/>
               </a:lnSpc>
               <a:buNone/>
             </a:pPr>
             <a:r>
-              <a:rPr lang="en-US" sz="1400" b="1" spc="-42" kern="0" dirty="0">
+              <a:rPr lang="en-US" sz="1400" b="1" kern="0" spc="-42" dirty="0">
                 <a:solidFill>
                   <a:srgbClr val="E5E0DF"/>
                 </a:solidFill>
@@ -3843,7 +3568,7 @@
           <a:bodyPr wrap="none" lIns="0" tIns="0" rIns="0" bIns="0" rtlCol="0" anchor="t"/>
           <a:lstStyle/>
           <a:p>
-            <a:pPr algn="l" indent="0" marL="0">
+            <a:pPr marL="0" indent="0" algn="l">
               <a:lnSpc>
                 <a:spcPct val="118000"/>
               </a:lnSpc>
@@ -3912,14 +3637,14 @@
           <a:bodyPr wrap="none" lIns="0" tIns="0" rIns="0" bIns="0" rtlCol="0" anchor="ctr"/>
           <a:lstStyle/>
           <a:p>
-            <a:pPr algn="ctr" indent="0" marL="0">
+            <a:pPr marL="0" indent="0" algn="ctr">
               <a:lnSpc>
                 <a:spcPct val="100000"/>
               </a:lnSpc>
               <a:buNone/>
             </a:pPr>
             <a:r>
-              <a:rPr lang="en-US" sz="1800" b="1" spc="-54" kern="0" dirty="0">
+              <a:rPr lang="en-US" sz="1800" b="1" kern="0" spc="-54" dirty="0">
                 <a:solidFill>
                   <a:srgbClr val="E5E0DF"/>
                 </a:solidFill>
@@ -3954,14 +3679,14 @@
           <a:bodyPr wrap="none" lIns="0" tIns="0" rIns="0" bIns="0" rtlCol="0" anchor="t"/>
           <a:lstStyle/>
           <a:p>
-            <a:pPr algn="l" indent="0" marL="0">
+            <a:pPr marL="0" indent="0" algn="l">
               <a:lnSpc>
                 <a:spcPct val="104000"/>
               </a:lnSpc>
               <a:buNone/>
             </a:pPr>
             <a:r>
-              <a:rPr lang="en-US" sz="1400" b="1" spc="-42" kern="0" dirty="0">
+              <a:rPr lang="en-US" sz="1400" b="1" kern="0" spc="-42" dirty="0">
                 <a:solidFill>
                   <a:srgbClr val="E5E0DF"/>
                 </a:solidFill>
@@ -3996,7 +3721,7 @@
           <a:bodyPr wrap="none" lIns="0" tIns="0" rIns="0" bIns="0" rtlCol="0" anchor="t"/>
           <a:lstStyle/>
           <a:p>
-            <a:pPr algn="l" indent="0" marL="0">
+            <a:pPr marL="0" indent="0" algn="l">
               <a:lnSpc>
                 <a:spcPct val="118000"/>
               </a:lnSpc>
@@ -4065,14 +3790,14 @@
           <a:bodyPr wrap="none" lIns="0" tIns="0" rIns="0" bIns="0" rtlCol="0" anchor="ctr"/>
           <a:lstStyle/>
           <a:p>
-            <a:pPr algn="ctr" indent="0" marL="0">
+            <a:pPr marL="0" indent="0" algn="ctr">
               <a:lnSpc>
                 <a:spcPct val="100000"/>
               </a:lnSpc>
               <a:buNone/>
             </a:pPr>
             <a:r>
-              <a:rPr lang="en-US" sz="1800" b="1" spc="-54" kern="0" dirty="0">
+              <a:rPr lang="en-US" sz="1800" b="1" kern="0" spc="-54" dirty="0">
                 <a:solidFill>
                   <a:srgbClr val="E5E0DF"/>
                 </a:solidFill>
@@ -4107,14 +3832,14 @@
           <a:bodyPr wrap="none" lIns="0" tIns="0" rIns="0" bIns="0" rtlCol="0" anchor="t"/>
           <a:lstStyle/>
           <a:p>
-            <a:pPr algn="l" indent="0" marL="0">
+            <a:pPr marL="0" indent="0" algn="l">
               <a:lnSpc>
                 <a:spcPct val="104000"/>
               </a:lnSpc>
               <a:buNone/>
             </a:pPr>
             <a:r>
-              <a:rPr lang="en-US" sz="1400" b="1" spc="-42" kern="0" dirty="0">
+              <a:rPr lang="en-US" sz="1400" b="1" kern="0" spc="-42" dirty="0">
                 <a:solidFill>
                   <a:srgbClr val="E5E0DF"/>
                 </a:solidFill>
@@ -4149,7 +3874,7 @@
           <a:bodyPr wrap="none" lIns="0" tIns="0" rIns="0" bIns="0" rtlCol="0" anchor="t"/>
           <a:lstStyle/>
           <a:p>
-            <a:pPr algn="l" indent="0" marL="0">
+            <a:pPr marL="0" indent="0" algn="l">
               <a:lnSpc>
                 <a:spcPct val="118000"/>
               </a:lnSpc>
@@ -4216,14 +3941,14 @@
           <a:bodyPr wrap="none" lIns="0" tIns="0" rIns="0" bIns="0" rtlCol="0" anchor="t"/>
           <a:lstStyle/>
           <a:p>
-            <a:pPr algn="l" indent="0" marL="0">
+            <a:pPr marL="0" indent="0" algn="l">
               <a:lnSpc>
                 <a:spcPct val="104000"/>
               </a:lnSpc>
               <a:buNone/>
             </a:pPr>
             <a:r>
-              <a:rPr lang="en-US" sz="3300" b="1" spc="-100" kern="0" dirty="0">
+              <a:rPr lang="en-US" sz="3300" b="1" kern="0" spc="-100" dirty="0">
                 <a:solidFill>
                   <a:srgbClr val="FFFFFF"/>
                 </a:solidFill>
@@ -4239,14 +3964,14 @@
       </p:sp>
       <p:pic>
         <p:nvPicPr>
-          <p:cNvPr id="3" name="Image 0" descr="preencoded.png">    </p:cNvPr>
+          <p:cNvPr id="3" name="Image 0" descr="preencoded.png"/>
           <p:cNvPicPr>
             <a:picLocks noChangeAspect="1"/>
           </p:cNvPicPr>
           <p:nvPr/>
         </p:nvPicPr>
         <p:blipFill>
-          <a:blip r:embed="rId1"/>
+          <a:blip r:embed="rId3"/>
           <a:stretch>
             <a:fillRect/>
           </a:stretch>
@@ -4284,7 +4009,7 @@
           </a:bodyPr>
           <a:lstStyle/>
           <a:p>
-            <a:pPr algn="l" indent="0" marL="0">
+            <a:pPr marL="0" indent="0" algn="l">
               <a:lnSpc>
                 <a:spcPct val="127000"/>
               </a:lnSpc>
@@ -4301,12 +4026,6 @@
               </a:rPr>
               <a:t>Bob AI translates model outputs into </a:t>
             </a:r>
-            <a:pPr algn="l" indent="0" marL="0">
-              <a:lnSpc>
-                <a:spcPct val="127000"/>
-              </a:lnSpc>
-              <a:buNone/>
-            </a:pPr>
             <a:r>
               <a:rPr lang="en-US" sz="1400" b="1" dirty="0">
                 <a:solidFill>
@@ -4318,12 +4037,6 @@
               </a:rPr>
               <a:t>actionable operator briefs</a:t>
             </a:r>
-            <a:pPr algn="l" indent="0" marL="0">
-              <a:lnSpc>
-                <a:spcPct val="127000"/>
-              </a:lnSpc>
-              <a:buNone/>
-            </a:pPr>
             <a:r>
               <a:rPr lang="en-US" sz="1400" dirty="0">
                 <a:solidFill>
@@ -4341,17 +4054,17 @@
       </p:sp>
       <p:pic>
         <p:nvPicPr>
-          <p:cNvPr id="5" name="Image 1" descr="preencoded.png">    </p:cNvPr>
+          <p:cNvPr id="5" name="Image 1" descr="preencoded.png"/>
           <p:cNvPicPr>
             <a:picLocks noChangeAspect="1"/>
           </p:cNvPicPr>
           <p:nvPr/>
         </p:nvPicPr>
         <p:blipFill>
-          <a:blip r:embed="rId2">
+          <a:blip>
             <a:extLst>
               <a:ext uri="{96DAC541-7B7A-43D3-8B79-37D633B846F1}">
-                <asvg:svgBlip xmlns:asvg="http://schemas.microsoft.com/office/drawing/2016/SVG/main" r:embed="rId3"/>
+                <asvg:svgBlip xmlns:asvg="http://schemas.microsoft.com/office/drawing/2016/SVG/main" r:embed="rId4"/>
               </a:ext>
             </a:extLst>
           </a:blip>
@@ -4390,14 +4103,14 @@
           <a:bodyPr wrap="none" lIns="0" tIns="0" rIns="0" bIns="0" rtlCol="0" anchor="t"/>
           <a:lstStyle/>
           <a:p>
-            <a:pPr algn="l" indent="0" marL="0">
+            <a:pPr marL="0" indent="0" algn="l">
               <a:lnSpc>
                 <a:spcPct val="104000"/>
               </a:lnSpc>
               <a:buNone/>
             </a:pPr>
             <a:r>
-              <a:rPr lang="en-US" sz="1650" b="1" spc="-50" kern="0" dirty="0">
+              <a:rPr lang="en-US" sz="1650" b="1" kern="0" spc="-50" dirty="0">
                 <a:solidFill>
                   <a:srgbClr val="E5E0DF"/>
                 </a:solidFill>
@@ -4434,7 +4147,7 @@
           </a:bodyPr>
           <a:lstStyle/>
           <a:p>
-            <a:pPr algn="l" indent="0" marL="0">
+            <a:pPr marL="0" indent="0" algn="l">
               <a:lnSpc>
                 <a:spcPct val="127000"/>
               </a:lnSpc>
@@ -4457,17 +4170,17 @@
       </p:sp>
       <p:pic>
         <p:nvPicPr>
-          <p:cNvPr id="8" name="Image 2" descr="preencoded.png">    </p:cNvPr>
+          <p:cNvPr id="8" name="Image 2" descr="preencoded.png"/>
           <p:cNvPicPr>
             <a:picLocks noChangeAspect="1"/>
           </p:cNvPicPr>
           <p:nvPr/>
         </p:nvPicPr>
         <p:blipFill>
-          <a:blip r:embed="rId4">
+          <a:blip>
             <a:extLst>
               <a:ext uri="{96DAC541-7B7A-43D3-8B79-37D633B846F1}">
-                <asvg:svgBlip xmlns:asvg="http://schemas.microsoft.com/office/drawing/2016/SVG/main" r:embed="rId5"/>
+                <asvg:svgBlip xmlns:asvg="http://schemas.microsoft.com/office/drawing/2016/SVG/main" r:embed="rId4"/>
               </a:ext>
             </a:extLst>
           </a:blip>
@@ -4506,14 +4219,14 @@
           <a:bodyPr wrap="none" lIns="0" tIns="0" rIns="0" bIns="0" rtlCol="0" anchor="t"/>
           <a:lstStyle/>
           <a:p>
-            <a:pPr algn="l" indent="0" marL="0">
+            <a:pPr marL="0" indent="0" algn="l">
               <a:lnSpc>
                 <a:spcPct val="104000"/>
               </a:lnSpc>
               <a:buNone/>
             </a:pPr>
             <a:r>
-              <a:rPr lang="en-US" sz="1650" b="1" spc="-50" kern="0" dirty="0">
+              <a:rPr lang="en-US" sz="1650" b="1" kern="0" spc="-50" dirty="0">
                 <a:solidFill>
                   <a:srgbClr val="E5E0DF"/>
                 </a:solidFill>
@@ -4550,7 +4263,7 @@
           </a:bodyPr>
           <a:lstStyle/>
           <a:p>
-            <a:pPr algn="l" indent="0" marL="0">
+            <a:pPr marL="0" indent="0" algn="l">
               <a:lnSpc>
                 <a:spcPct val="127000"/>
               </a:lnSpc>
@@ -4573,17 +4286,17 @@
       </p:sp>
       <p:pic>
         <p:nvPicPr>
-          <p:cNvPr id="11" name="Image 3" descr="preencoded.png">    </p:cNvPr>
+          <p:cNvPr id="11" name="Image 3" descr="preencoded.png"/>
           <p:cNvPicPr>
             <a:picLocks noChangeAspect="1"/>
           </p:cNvPicPr>
           <p:nvPr/>
         </p:nvPicPr>
         <p:blipFill>
-          <a:blip r:embed="rId6">
+          <a:blip>
             <a:extLst>
               <a:ext uri="{96DAC541-7B7A-43D3-8B79-37D633B846F1}">
-                <asvg:svgBlip xmlns:asvg="http://schemas.microsoft.com/office/drawing/2016/SVG/main" r:embed="rId7"/>
+                <asvg:svgBlip xmlns:asvg="http://schemas.microsoft.com/office/drawing/2016/SVG/main" r:embed="rId4"/>
               </a:ext>
             </a:extLst>
           </a:blip>
@@ -4622,14 +4335,14 @@
           <a:bodyPr wrap="none" lIns="0" tIns="0" rIns="0" bIns="0" rtlCol="0" anchor="t"/>
           <a:lstStyle/>
           <a:p>
-            <a:pPr algn="l" indent="0" marL="0">
+            <a:pPr marL="0" indent="0" algn="l">
               <a:lnSpc>
                 <a:spcPct val="104000"/>
               </a:lnSpc>
               <a:buNone/>
             </a:pPr>
             <a:r>
-              <a:rPr lang="en-US" sz="1650" b="1" spc="-50" kern="0" dirty="0">
+              <a:rPr lang="en-US" sz="1650" b="1" kern="0" spc="-50" dirty="0">
                 <a:solidFill>
                   <a:srgbClr val="E5E0DF"/>
                 </a:solidFill>
@@ -4666,7 +4379,7 @@
           </a:bodyPr>
           <a:lstStyle/>
           <a:p>
-            <a:pPr algn="l" indent="0" marL="0">
+            <a:pPr marL="0" indent="0" algn="l">
               <a:lnSpc>
                 <a:spcPct val="127000"/>
               </a:lnSpc>
@@ -4683,12 +4396,6 @@
               </a:rPr>
               <a:t>Fallback handling, diagnostics, and Cloudflare/API restriction management in </a:t>
             </a:r>
-            <a:pPr algn="l" indent="0" marL="0">
-              <a:lnSpc>
-                <a:spcPct val="127000"/>
-              </a:lnSpc>
-              <a:buNone/>
-            </a:pPr>
             <a:r>
               <a:rPr lang="en-US" sz="1400" dirty="0">
                 <a:solidFill>
@@ -4753,14 +4460,14 @@
           <a:bodyPr wrap="none" lIns="0" tIns="0" rIns="0" bIns="0" rtlCol="0" anchor="t"/>
           <a:lstStyle/>
           <a:p>
-            <a:pPr algn="l" indent="0" marL="0">
+            <a:pPr marL="0" indent="0" algn="l">
               <a:lnSpc>
                 <a:spcPct val="104000"/>
               </a:lnSpc>
               <a:buNone/>
             </a:pPr>
             <a:r>
-              <a:rPr lang="en-US" sz="3100" b="1" spc="-94" kern="0" dirty="0">
+              <a:rPr lang="en-US" sz="3100" b="1" kern="0" spc="-94" dirty="0">
                 <a:solidFill>
                   <a:srgbClr val="FFFFFF"/>
                 </a:solidFill>
@@ -4776,17 +4483,17 @@
       </p:sp>
       <p:pic>
         <p:nvPicPr>
-          <p:cNvPr id="3" name="Image 0" descr="preencoded.png">    </p:cNvPr>
+          <p:cNvPr id="3" name="Image 0" descr="preencoded.png"/>
           <p:cNvPicPr>
             <a:picLocks noChangeAspect="1"/>
           </p:cNvPicPr>
           <p:nvPr/>
         </p:nvPicPr>
         <p:blipFill>
-          <a:blip r:embed="rId1">
+          <a:blip>
             <a:extLst>
               <a:ext uri="{96DAC541-7B7A-43D3-8B79-37D633B846F1}">
-                <asvg:svgBlip xmlns:asvg="http://schemas.microsoft.com/office/drawing/2016/SVG/main" r:embed="rId2"/>
+                <asvg:svgBlip xmlns:asvg="http://schemas.microsoft.com/office/drawing/2016/SVG/main" r:embed="rId3"/>
               </a:ext>
             </a:extLst>
           </a:blip>
@@ -4825,14 +4532,14 @@
           <a:bodyPr wrap="none" lIns="0" tIns="0" rIns="0" bIns="0" rtlCol="0" anchor="t"/>
           <a:lstStyle/>
           <a:p>
-            <a:pPr algn="l" indent="0" marL="0">
+            <a:pPr marL="0" indent="0" algn="l">
               <a:lnSpc>
                 <a:spcPct val="104000"/>
               </a:lnSpc>
               <a:buNone/>
             </a:pPr>
             <a:r>
-              <a:rPr lang="en-US" sz="1550" b="1" spc="-47" kern="0" dirty="0">
+              <a:rPr lang="en-US" sz="1550" b="1" kern="0" spc="-47" dirty="0">
                 <a:solidFill>
                   <a:srgbClr val="E5E0DF"/>
                 </a:solidFill>
@@ -4867,7 +4574,7 @@
           <a:bodyPr wrap="none" lIns="0" tIns="0" rIns="0" bIns="0" rtlCol="0" anchor="t"/>
           <a:lstStyle/>
           <a:p>
-            <a:pPr algn="l" indent="0" marL="0">
+            <a:pPr marL="0" indent="0" algn="l">
               <a:lnSpc>
                 <a:spcPct val="123000"/>
               </a:lnSpc>
@@ -4890,14 +4597,14 @@
       </p:sp>
       <p:pic>
         <p:nvPicPr>
-          <p:cNvPr id="6" name="Image 1" descr="preencoded.png">    </p:cNvPr>
+          <p:cNvPr id="6" name="Image 1" descr="preencoded.png"/>
           <p:cNvPicPr>
             <a:picLocks noChangeAspect="1"/>
           </p:cNvPicPr>
           <p:nvPr/>
         </p:nvPicPr>
         <p:blipFill>
-          <a:blip r:embed="rId3">
+          <a:blip>
             <a:extLst>
               <a:ext uri="{96DAC541-7B7A-43D3-8B79-37D633B846F1}">
                 <asvg:svgBlip xmlns:asvg="http://schemas.microsoft.com/office/drawing/2016/SVG/main" r:embed="rId4"/>
@@ -4939,14 +4646,14 @@
           <a:bodyPr wrap="none" lIns="0" tIns="0" rIns="0" bIns="0" rtlCol="0" anchor="t"/>
           <a:lstStyle/>
           <a:p>
-            <a:pPr algn="l" indent="0" marL="0">
+            <a:pPr marL="0" indent="0" algn="l">
               <a:lnSpc>
                 <a:spcPct val="104000"/>
               </a:lnSpc>
               <a:buNone/>
             </a:pPr>
             <a:r>
-              <a:rPr lang="en-US" sz="1550" b="1" spc="-47" kern="0" dirty="0">
+              <a:rPr lang="en-US" sz="1550" b="1" kern="0" spc="-47" dirty="0">
                 <a:solidFill>
                   <a:srgbClr val="E5E0DF"/>
                 </a:solidFill>
@@ -4981,7 +4688,7 @@
           <a:bodyPr wrap="none" lIns="0" tIns="0" rIns="0" bIns="0" rtlCol="0" anchor="t"/>
           <a:lstStyle/>
           <a:p>
-            <a:pPr algn="l" indent="0" marL="0">
+            <a:pPr marL="0" indent="0" algn="l">
               <a:lnSpc>
                 <a:spcPct val="123000"/>
               </a:lnSpc>
@@ -5004,14 +4711,128 @@
       </p:sp>
       <p:pic>
         <p:nvPicPr>
-          <p:cNvPr id="9" name="Image 2" descr="preencoded.png">    </p:cNvPr>
+          <p:cNvPr id="9" name="Image 2" descr="preencoded.png"/>
           <p:cNvPicPr>
             <a:picLocks noChangeAspect="1"/>
           </p:cNvPicPr>
           <p:nvPr/>
         </p:nvPicPr>
         <p:blipFill>
-          <a:blip r:embed="rId5">
+          <a:blip>
+            <a:extLst>
+              <a:ext uri="{96DAC541-7B7A-43D3-8B79-37D633B846F1}">
+                <asvg:svgBlip xmlns:asvg="http://schemas.microsoft.com/office/drawing/2016/SVG/main" r:embed="rId5"/>
+              </a:ext>
+            </a:extLst>
+          </a:blip>
+          <a:stretch>
+            <a:fillRect/>
+          </a:stretch>
+        </p:blipFill>
+        <p:spPr>
+          <a:xfrm>
+            <a:off x="698086" y="3340100"/>
+            <a:ext cx="420776" cy="420787"/>
+          </a:xfrm>
+          <a:prstGeom prst="rect">
+            <a:avLst/>
+          </a:prstGeom>
+        </p:spPr>
+      </p:pic>
+      <p:sp>
+        <p:nvSpPr>
+          <p:cNvPr id="10" name="Text 5"/>
+          <p:cNvSpPr/>
+          <p:nvPr/>
+        </p:nvSpPr>
+        <p:spPr>
+          <a:xfrm>
+            <a:off x="1296360" y="3340100"/>
+            <a:ext cx="5154484" cy="247551"/>
+          </a:xfrm>
+          <a:prstGeom prst="rect">
+            <a:avLst/>
+          </a:prstGeom>
+          <a:noFill/>
+          <a:ln/>
+        </p:spPr>
+        <p:txBody>
+          <a:bodyPr wrap="none" lIns="0" tIns="0" rIns="0" bIns="0" rtlCol="0" anchor="t"/>
+          <a:lstStyle/>
+          <a:p>
+            <a:pPr marL="0" indent="0" algn="l">
+              <a:lnSpc>
+                <a:spcPct val="104000"/>
+              </a:lnSpc>
+              <a:buNone/>
+            </a:pPr>
+            <a:r>
+              <a:rPr lang="en-US" sz="1550" b="1" kern="0" spc="-47" dirty="0">
+                <a:solidFill>
+                  <a:srgbClr val="E5E0DF"/>
+                </a:solidFill>
+                <a:latin typeface="Overpass Bold" pitchFamily="34" charset="0"/>
+                <a:ea typeface="Overpass Bold" pitchFamily="34" charset="-122"/>
+                <a:cs typeface="Overpass Bold" pitchFamily="34" charset="-120"/>
+              </a:rPr>
+              <a:t>Anomaly Precision</a:t>
+            </a:r>
+            <a:endParaRPr lang="en-US" sz="1550" dirty="0"/>
+          </a:p>
+        </p:txBody>
+      </p:sp>
+      <p:sp>
+        <p:nvSpPr>
+          <p:cNvPr id="11" name="Text 6"/>
+          <p:cNvSpPr/>
+          <p:nvPr/>
+        </p:nvSpPr>
+        <p:spPr>
+          <a:xfrm>
+            <a:off x="1296360" y="3729633"/>
+            <a:ext cx="5154484" cy="248146"/>
+          </a:xfrm>
+          <a:prstGeom prst="rect">
+            <a:avLst/>
+          </a:prstGeom>
+          <a:noFill/>
+          <a:ln/>
+        </p:spPr>
+        <p:txBody>
+          <a:bodyPr wrap="none" lIns="0" tIns="0" rIns="0" bIns="0" rtlCol="0" anchor="t"/>
+          <a:lstStyle/>
+          <a:p>
+            <a:pPr marL="0" indent="0" algn="l">
+              <a:lnSpc>
+                <a:spcPct val="123000"/>
+              </a:lnSpc>
+              <a:buNone/>
+            </a:pPr>
+            <a:r>
+              <a:rPr lang="en-US" sz="1300" dirty="0">
+                <a:solidFill>
+                  <a:srgbClr val="E5E0DF"/>
+                </a:solidFill>
+                <a:latin typeface="Overpass" pitchFamily="34" charset="0"/>
+                <a:ea typeface="Overpass" pitchFamily="34" charset="-122"/>
+                <a:cs typeface="Overpass" pitchFamily="34" charset="-120"/>
+              </a:rPr>
+              <a:t>IsolationForest evaluated for outlier detection quality</a:t>
+            </a:r>
+            <a:endParaRPr lang="en-US" sz="1300" dirty="0"/>
+          </a:p>
+        </p:txBody>
+      </p:sp>
+      <p:pic>
+        <p:nvPicPr>
+          <p:cNvPr id="12" name="Image 3" descr="preencoded.png"/>
+          <p:cNvPicPr>
+            <a:picLocks noChangeAspect="1"/>
+          </p:cNvPicPr>
+          <p:nvPr/>
+        </p:nvPicPr>
+        <p:blipFill>
+          <a:blip>
             <a:extLst>
               <a:ext uri="{96DAC541-7B7A-43D3-8B79-37D633B846F1}">
                 <asvg:svgBlip xmlns:asvg="http://schemas.microsoft.com/office/drawing/2016/SVG/main" r:embed="rId6"/>
@@ -5024,7 +4845,7 @@
         </p:blipFill>
         <p:spPr>
           <a:xfrm>
-            <a:off x="698086" y="3340100"/>
+            <a:off x="698086" y="4261743"/>
             <a:ext cx="420776" cy="420787"/>
           </a:xfrm>
           <a:prstGeom prst="rect">
@@ -5034,13 +4855,13 @@
       </p:pic>
       <p:sp>
         <p:nvSpPr>
-          <p:cNvPr id="10" name="Text 5"/>
-          <p:cNvSpPr/>
-          <p:nvPr/>
-        </p:nvSpPr>
-        <p:spPr>
-          <a:xfrm>
-            <a:off x="1296360" y="3340100"/>
+          <p:cNvPr id="13" name="Text 7"/>
+          <p:cNvSpPr/>
+          <p:nvPr/>
+        </p:nvSpPr>
+        <p:spPr>
+          <a:xfrm>
+            <a:off x="1296360" y="4261743"/>
             <a:ext cx="5154484" cy="247551"/>
           </a:xfrm>
           <a:prstGeom prst="rect">
@@ -5053,14 +4874,14 @@
           <a:bodyPr wrap="none" lIns="0" tIns="0" rIns="0" bIns="0" rtlCol="0" anchor="t"/>
           <a:lstStyle/>
           <a:p>
-            <a:pPr algn="l" indent="0" marL="0">
+            <a:pPr marL="0" indent="0" algn="l">
               <a:lnSpc>
                 <a:spcPct val="104000"/>
               </a:lnSpc>
               <a:buNone/>
             </a:pPr>
             <a:r>
-              <a:rPr lang="en-US" sz="1550" b="1" spc="-47" kern="0" dirty="0">
+              <a:rPr lang="en-US" sz="1550" b="1" kern="0" spc="-47" dirty="0">
                 <a:solidFill>
                   <a:srgbClr val="E5E0DF"/>
                 </a:solidFill>
@@ -5068,7 +4889,7 @@
                 <a:ea typeface="Overpass Bold" pitchFamily="34" charset="-122"/>
                 <a:cs typeface="Overpass Bold" pitchFamily="34" charset="-120"/>
               </a:rPr>
-              <a:t>Anomaly Precision</a:t>
+              <a:t>Faster Triage</a:t>
             </a:r>
             <a:endParaRPr lang="en-US" sz="1550" dirty="0"/>
           </a:p>
@@ -5076,13 +4897,13 @@
       </p:sp>
       <p:sp>
         <p:nvSpPr>
-          <p:cNvPr id="11" name="Text 6"/>
-          <p:cNvSpPr/>
-          <p:nvPr/>
-        </p:nvSpPr>
-        <p:spPr>
-          <a:xfrm>
-            <a:off x="1296360" y="3729633"/>
+          <p:cNvPr id="14" name="Text 8"/>
+          <p:cNvSpPr/>
+          <p:nvPr/>
+        </p:nvSpPr>
+        <p:spPr>
+          <a:xfrm>
+            <a:off x="1296360" y="4651276"/>
             <a:ext cx="5154484" cy="248146"/>
           </a:xfrm>
           <a:prstGeom prst="rect">
@@ -5095,7 +4916,7 @@
           <a:bodyPr wrap="none" lIns="0" tIns="0" rIns="0" bIns="0" rtlCol="0" anchor="t"/>
           <a:lstStyle/>
           <a:p>
-            <a:pPr algn="l" indent="0" marL="0">
+            <a:pPr marL="0" indent="0" algn="l">
               <a:lnSpc>
                 <a:spcPct val="123000"/>
               </a:lnSpc>
@@ -5110,7 +4931,7 @@
                 <a:ea typeface="Overpass" pitchFamily="34" charset="-122"/>
                 <a:cs typeface="Overpass" pitchFamily="34" charset="-120"/>
               </a:rPr>
-              <a:t>IsolationForest evaluated for outlier detection quality</a:t>
+              <a:t>Bob AI briefs reduce manual analysis time for operators</a:t>
             </a:r>
             <a:endParaRPr lang="en-US" sz="1300" dirty="0"/>
           </a:p>
@@ -5118,17 +4939,17 @@
       </p:sp>
       <p:pic>
         <p:nvPicPr>
-          <p:cNvPr id="12" name="Image 3" descr="preencoded.png">    </p:cNvPr>
+          <p:cNvPr id="15" name="Image 4" descr="preencoded.png"/>
           <p:cNvPicPr>
             <a:picLocks noChangeAspect="1"/>
           </p:cNvPicPr>
           <p:nvPr/>
         </p:nvPicPr>
         <p:blipFill>
-          <a:blip r:embed="rId7">
+          <a:blip>
             <a:extLst>
               <a:ext uri="{96DAC541-7B7A-43D3-8B79-37D633B846F1}">
-                <asvg:svgBlip xmlns:asvg="http://schemas.microsoft.com/office/drawing/2016/SVG/main" r:embed="rId8"/>
+                <asvg:svgBlip xmlns:asvg="http://schemas.microsoft.com/office/drawing/2016/SVG/main" r:embed="rId7"/>
               </a:ext>
             </a:extLst>
           </a:blip>
@@ -5138,7 +4959,7 @@
         </p:blipFill>
         <p:spPr>
           <a:xfrm>
-            <a:off x="698086" y="4261743"/>
+            <a:off x="698086" y="5183386"/>
             <a:ext cx="420776" cy="420787"/>
           </a:xfrm>
           <a:prstGeom prst="rect">
@@ -5148,13 +4969,13 @@
       </p:pic>
       <p:sp>
         <p:nvSpPr>
-          <p:cNvPr id="13" name="Text 7"/>
-          <p:cNvSpPr/>
-          <p:nvPr/>
-        </p:nvSpPr>
-        <p:spPr>
-          <a:xfrm>
-            <a:off x="1296360" y="4261743"/>
+          <p:cNvPr id="16" name="Text 9"/>
+          <p:cNvSpPr/>
+          <p:nvPr/>
+        </p:nvSpPr>
+        <p:spPr>
+          <a:xfrm>
+            <a:off x="1296360" y="5183386"/>
             <a:ext cx="5154484" cy="247551"/>
           </a:xfrm>
           <a:prstGeom prst="rect">
@@ -5167,14 +4988,14 @@
           <a:bodyPr wrap="none" lIns="0" tIns="0" rIns="0" bIns="0" rtlCol="0" anchor="t"/>
           <a:lstStyle/>
           <a:p>
-            <a:pPr algn="l" indent="0" marL="0">
+            <a:pPr marL="0" indent="0" algn="l">
               <a:lnSpc>
                 <a:spcPct val="104000"/>
               </a:lnSpc>
               <a:buNone/>
             </a:pPr>
             <a:r>
-              <a:rPr lang="en-US" sz="1550" b="1" spc="-47" kern="0" dirty="0">
+              <a:rPr lang="en-US" sz="1550" b="1" kern="0" spc="-47" dirty="0">
                 <a:solidFill>
                   <a:srgbClr val="E5E0DF"/>
                 </a:solidFill>
@@ -5182,7 +5003,7 @@
                 <a:ea typeface="Overpass Bold" pitchFamily="34" charset="-122"/>
                 <a:cs typeface="Overpass Bold" pitchFamily="34" charset="-120"/>
               </a:rPr>
-              <a:t>Faster Triage</a:t>
+              <a:t>Reduced Curtailment</a:t>
             </a:r>
             <a:endParaRPr lang="en-US" sz="1550" dirty="0"/>
           </a:p>
@@ -5190,26 +5011,28 @@
       </p:sp>
       <p:sp>
         <p:nvSpPr>
-          <p:cNvPr id="14" name="Text 8"/>
-          <p:cNvSpPr/>
-          <p:nvPr/>
-        </p:nvSpPr>
-        <p:spPr>
-          <a:xfrm>
-            <a:off x="1296360" y="4651276"/>
-            <a:ext cx="5154484" cy="248146"/>
-          </a:xfrm>
-          <a:prstGeom prst="rect">
-            <a:avLst/>
-          </a:prstGeom>
-          <a:noFill/>
-          <a:ln/>
-        </p:spPr>
-        <p:txBody>
-          <a:bodyPr wrap="none" lIns="0" tIns="0" rIns="0" bIns="0" rtlCol="0" anchor="t"/>
-          <a:lstStyle/>
-          <a:p>
-            <a:pPr algn="l" indent="0" marL="0">
+          <p:cNvPr id="17" name="Text 10"/>
+          <p:cNvSpPr/>
+          <p:nvPr/>
+        </p:nvSpPr>
+        <p:spPr>
+          <a:xfrm>
+            <a:off x="1296360" y="5572919"/>
+            <a:ext cx="5154484" cy="496292"/>
+          </a:xfrm>
+          <a:prstGeom prst="rect">
+            <a:avLst/>
+          </a:prstGeom>
+          <a:noFill/>
+          <a:ln/>
+        </p:spPr>
+        <p:txBody>
+          <a:bodyPr wrap="square" lIns="0" tIns="0" rIns="0" bIns="0" rtlCol="0" anchor="t">
+            <a:normAutofit/>
+          </a:bodyPr>
+          <a:lstStyle/>
+          <a:p>
+            <a:pPr marL="0" indent="0" algn="l">
               <a:lnSpc>
                 <a:spcPct val="123000"/>
               </a:lnSpc>
@@ -5224,36 +5047,52 @@
                 <a:ea typeface="Overpass" pitchFamily="34" charset="-122"/>
                 <a:cs typeface="Overpass" pitchFamily="34" charset="-120"/>
               </a:rPr>
-              <a:t>Bob AI briefs reduce manual analysis time for operators</a:t>
+              <a:t>Forecasting enables proactive dispatch, lowering renewable curtailment potential</a:t>
             </a:r>
             <a:endParaRPr lang="en-US" sz="1300" dirty="0"/>
           </a:p>
         </p:txBody>
+      </p:sp>
+      <p:sp>
+        <p:nvSpPr>
+          <p:cNvPr id="18" name="Shape 11"/>
+          <p:cNvSpPr/>
+          <p:nvPr/>
+        </p:nvSpPr>
+        <p:spPr>
+          <a:xfrm>
+            <a:off x="6867750" y="1496814"/>
+            <a:ext cx="4632110" cy="1084163"/>
+          </a:xfrm>
+          <a:prstGeom prst="roundRect">
+            <a:avLst>
+              <a:gd name="adj" fmla="val 6520"/>
+            </a:avLst>
+          </a:prstGeom>
+          <a:solidFill>
+            <a:srgbClr val="7E023C"/>
+          </a:solidFill>
+          <a:ln/>
+        </p:spPr>
       </p:sp>
       <p:pic>
         <p:nvPicPr>
-          <p:cNvPr id="15" name="Image 4" descr="preencoded.png">    </p:cNvPr>
+          <p:cNvPr id="19" name="Image 5" descr="preencoded.png"/>
           <p:cNvPicPr>
             <a:picLocks noChangeAspect="1"/>
           </p:cNvPicPr>
           <p:nvPr/>
         </p:nvPicPr>
         <p:blipFill>
-          <a:blip r:embed="rId9">
-            <a:extLst>
-              <a:ext uri="{96DAC541-7B7A-43D3-8B79-37D633B846F1}">
-                <asvg:svgBlip xmlns:asvg="http://schemas.microsoft.com/office/drawing/2016/SVG/main" r:embed="rId10"/>
-              </a:ext>
-            </a:extLst>
-          </a:blip>
+          <a:blip r:embed="rId8"/>
           <a:stretch>
             <a:fillRect/>
           </a:stretch>
         </p:blipFill>
         <p:spPr>
           <a:xfrm>
-            <a:off x="698086" y="5183386"/>
-            <a:ext cx="420776" cy="420787"/>
+            <a:off x="7036021" y="1698724"/>
+            <a:ext cx="210338" cy="168275"/>
           </a:xfrm>
           <a:prstGeom prst="rect">
             <a:avLst/>
@@ -5262,182 +5101,44 @@
       </p:pic>
       <p:sp>
         <p:nvSpPr>
-          <p:cNvPr id="16" name="Text 9"/>
-          <p:cNvSpPr/>
-          <p:nvPr/>
-        </p:nvSpPr>
-        <p:spPr>
-          <a:xfrm>
-            <a:off x="1296360" y="5183386"/>
-            <a:ext cx="5154484" cy="247551"/>
-          </a:xfrm>
-          <a:prstGeom prst="rect">
-            <a:avLst/>
-          </a:prstGeom>
-          <a:noFill/>
-          <a:ln/>
-        </p:spPr>
-        <p:txBody>
-          <a:bodyPr wrap="none" lIns="0" tIns="0" rIns="0" bIns="0" rtlCol="0" anchor="t"/>
-          <a:lstStyle/>
-          <a:p>
-            <a:pPr algn="l" indent="0" marL="0">
-              <a:lnSpc>
-                <a:spcPct val="104000"/>
-              </a:lnSpc>
-              <a:buNone/>
-            </a:pPr>
-            <a:r>
-              <a:rPr lang="en-US" sz="1550" b="1" spc="-47" kern="0" dirty="0">
-                <a:solidFill>
-                  <a:srgbClr val="E5E0DF"/>
+          <p:cNvPr id="20" name="Text 12"/>
+          <p:cNvSpPr/>
+          <p:nvPr/>
+        </p:nvSpPr>
+        <p:spPr>
+          <a:xfrm>
+            <a:off x="7414630" y="1666677"/>
+            <a:ext cx="3916959" cy="744438"/>
+          </a:xfrm>
+          <a:prstGeom prst="rect">
+            <a:avLst/>
+          </a:prstGeom>
+          <a:noFill/>
+          <a:ln/>
+        </p:spPr>
+        <p:txBody>
+          <a:bodyPr wrap="square" lIns="0" tIns="0" rIns="0" bIns="0" rtlCol="0" anchor="t">
+            <a:normAutofit/>
+          </a:bodyPr>
+          <a:lstStyle/>
+          <a:p>
+            <a:pPr marL="0" indent="0" algn="l">
+              <a:lnSpc>
+                <a:spcPct val="123000"/>
+              </a:lnSpc>
+              <a:buNone/>
+            </a:pPr>
+            <a:r>
+              <a:rPr lang="en-US" sz="1300" b="1" dirty="0">
+                <a:solidFill>
+                  <a:srgbClr val="FFFFFF"/>
                 </a:solidFill>
                 <a:latin typeface="Overpass Bold" pitchFamily="34" charset="0"/>
                 <a:ea typeface="Overpass Bold" pitchFamily="34" charset="-122"/>
                 <a:cs typeface="Overpass Bold" pitchFamily="34" charset="-120"/>
               </a:rPr>
-              <a:t>Reduced Curtailment</a:t>
-            </a:r>
-            <a:endParaRPr lang="en-US" sz="1550" dirty="0"/>
-          </a:p>
-        </p:txBody>
-      </p:sp>
-      <p:sp>
-        <p:nvSpPr>
-          <p:cNvPr id="17" name="Text 10"/>
-          <p:cNvSpPr/>
-          <p:nvPr/>
-        </p:nvSpPr>
-        <p:spPr>
-          <a:xfrm>
-            <a:off x="1296360" y="5572919"/>
-            <a:ext cx="5154484" cy="496292"/>
-          </a:xfrm>
-          <a:prstGeom prst="rect">
-            <a:avLst/>
-          </a:prstGeom>
-          <a:noFill/>
-          <a:ln/>
-        </p:spPr>
-        <p:txBody>
-          <a:bodyPr wrap="square" lIns="0" tIns="0" rIns="0" bIns="0" rtlCol="0" anchor="t">
-            <a:normAutofit/>
-          </a:bodyPr>
-          <a:lstStyle/>
-          <a:p>
-            <a:pPr algn="l" indent="0" marL="0">
-              <a:lnSpc>
-                <a:spcPct val="123000"/>
-              </a:lnSpc>
-              <a:buNone/>
-            </a:pPr>
-            <a:r>
-              <a:rPr lang="en-US" sz="1300" dirty="0">
-                <a:solidFill>
-                  <a:srgbClr val="E5E0DF"/>
-                </a:solidFill>
-                <a:latin typeface="Overpass" pitchFamily="34" charset="0"/>
-                <a:ea typeface="Overpass" pitchFamily="34" charset="-122"/>
-                <a:cs typeface="Overpass" pitchFamily="34" charset="-120"/>
-              </a:rPr>
-              <a:t>Forecasting enables proactive dispatch, lowering renewable curtailment potential</a:t>
-            </a:r>
-            <a:endParaRPr lang="en-US" sz="1300" dirty="0"/>
-          </a:p>
-        </p:txBody>
-      </p:sp>
-      <p:sp>
-        <p:nvSpPr>
-          <p:cNvPr id="18" name="Shape 11"/>
-          <p:cNvSpPr/>
-          <p:nvPr/>
-        </p:nvSpPr>
-        <p:spPr>
-          <a:xfrm>
-            <a:off x="6867750" y="1496814"/>
-            <a:ext cx="4632110" cy="1084163"/>
-          </a:xfrm>
-          <a:prstGeom prst="roundRect">
-            <a:avLst>
-              <a:gd name="adj" fmla="val 6520"/>
-            </a:avLst>
-          </a:prstGeom>
-          <a:solidFill>
-            <a:srgbClr val="7E023C"/>
-          </a:solidFill>
-          <a:ln/>
-        </p:spPr>
-      </p:sp>
-      <p:pic>
-        <p:nvPicPr>
-          <p:cNvPr id="19" name="Image 5" descr="preencoded.png">    </p:cNvPr>
-          <p:cNvPicPr>
-            <a:picLocks noChangeAspect="1"/>
-          </p:cNvPicPr>
-          <p:nvPr/>
-        </p:nvPicPr>
-        <p:blipFill>
-          <a:blip r:embed="rId11"/>
-          <a:stretch>
-            <a:fillRect/>
-          </a:stretch>
-        </p:blipFill>
-        <p:spPr>
-          <a:xfrm>
-            <a:off x="7036021" y="1698724"/>
-            <a:ext cx="210338" cy="168275"/>
-          </a:xfrm>
-          <a:prstGeom prst="rect">
-            <a:avLst/>
-          </a:prstGeom>
-        </p:spPr>
-      </p:pic>
-      <p:sp>
-        <p:nvSpPr>
-          <p:cNvPr id="20" name="Text 12"/>
-          <p:cNvSpPr/>
-          <p:nvPr/>
-        </p:nvSpPr>
-        <p:spPr>
-          <a:xfrm>
-            <a:off x="7414630" y="1666677"/>
-            <a:ext cx="3916959" cy="744438"/>
-          </a:xfrm>
-          <a:prstGeom prst="rect">
-            <a:avLst/>
-          </a:prstGeom>
-          <a:noFill/>
-          <a:ln/>
-        </p:spPr>
-        <p:txBody>
-          <a:bodyPr wrap="square" lIns="0" tIns="0" rIns="0" bIns="0" rtlCol="0" anchor="t">
-            <a:normAutofit/>
-          </a:bodyPr>
-          <a:lstStyle/>
-          <a:p>
-            <a:pPr algn="l" indent="0" marL="0">
-              <a:lnSpc>
-                <a:spcPct val="123000"/>
-              </a:lnSpc>
-              <a:buNone/>
-            </a:pPr>
-            <a:r>
-              <a:rPr lang="en-US" sz="1300" b="1" dirty="0">
-                <a:solidFill>
-                  <a:srgbClr val="FFFFFF"/>
-                </a:solidFill>
-                <a:latin typeface="Overpass Bold" pitchFamily="34" charset="0"/>
-                <a:ea typeface="Overpass Bold" pitchFamily="34" charset="-122"/>
-                <a:cs typeface="Overpass Bold" pitchFamily="34" charset="-120"/>
-              </a:rPr>
               <a:t>Note:</a:t>
             </a:r>
-            <a:pPr algn="l" indent="0" marL="0">
-              <a:lnSpc>
-                <a:spcPct val="123000"/>
-              </a:lnSpc>
-              <a:buNone/>
-            </a:pPr>
             <a:r>
               <a:rPr lang="en-US" sz="1300" dirty="0">
                 <a:solidFill>
@@ -5480,14 +5181,14 @@
       </p:grpSpPr>
       <p:pic>
         <p:nvPicPr>
-          <p:cNvPr id="2" name="Image 0" descr="preencoded.png">    </p:cNvPr>
+          <p:cNvPr id="2" name="Image 0" descr="preencoded.png"/>
           <p:cNvPicPr>
             <a:picLocks noChangeAspect="1"/>
           </p:cNvPicPr>
           <p:nvPr/>
         </p:nvPicPr>
         <p:blipFill>
-          <a:blip r:embed="rId1"/>
+          <a:blip r:embed="rId3"/>
           <a:stretch>
             <a:fillRect/>
           </a:stretch>
@@ -5523,14 +5224,14 @@
           <a:bodyPr wrap="none" lIns="0" tIns="0" rIns="0" bIns="0" rtlCol="0" anchor="t"/>
           <a:lstStyle/>
           <a:p>
-            <a:pPr algn="l" indent="0" marL="0">
+            <a:pPr marL="0" indent="0" algn="l">
               <a:lnSpc>
                 <a:spcPct val="104000"/>
               </a:lnSpc>
               <a:buNone/>
             </a:pPr>
             <a:r>
-              <a:rPr lang="en-US" sz="2900" b="1" spc="-88" kern="0" dirty="0">
+              <a:rPr lang="en-US" sz="2900" b="1" kern="0" spc="-88" dirty="0">
                 <a:solidFill>
                   <a:srgbClr val="FFFFFF"/>
                 </a:solidFill>
@@ -5592,14 +5293,14 @@
           <a:bodyPr wrap="none" lIns="0" tIns="0" rIns="0" bIns="0" rtlCol="0" anchor="t"/>
           <a:lstStyle/>
           <a:p>
-            <a:pPr algn="l" indent="0" marL="0">
+            <a:pPr marL="0" indent="0" algn="l">
               <a:lnSpc>
                 <a:spcPct val="104000"/>
               </a:lnSpc>
               <a:buNone/>
             </a:pPr>
             <a:r>
-              <a:rPr lang="en-US" sz="1450" b="1" spc="-44" kern="0" dirty="0">
+              <a:rPr lang="en-US" sz="1450" b="1" kern="0" spc="-44" dirty="0">
                 <a:solidFill>
                   <a:srgbClr val="E5E0DF"/>
                 </a:solidFill>
@@ -5634,7 +5335,7 @@
           <a:bodyPr wrap="none" lIns="0" tIns="0" rIns="0" bIns="0" rtlCol="0" anchor="t"/>
           <a:lstStyle/>
           <a:p>
-            <a:pPr algn="l" indent="0" marL="0">
+            <a:pPr marL="0" indent="0" algn="l">
               <a:lnSpc>
                 <a:spcPct val="120000"/>
               </a:lnSpc>
@@ -5703,14 +5404,14 @@
           <a:bodyPr wrap="none" lIns="0" tIns="0" rIns="0" bIns="0" rtlCol="0" anchor="t"/>
           <a:lstStyle/>
           <a:p>
-            <a:pPr algn="l" indent="0" marL="0">
+            <a:pPr marL="0" indent="0" algn="l">
               <a:lnSpc>
                 <a:spcPct val="104000"/>
               </a:lnSpc>
               <a:buNone/>
             </a:pPr>
             <a:r>
-              <a:rPr lang="en-US" sz="1450" b="1" spc="-44" kern="0" dirty="0">
+              <a:rPr lang="en-US" sz="1450" b="1" kern="0" spc="-44" dirty="0">
                 <a:solidFill>
                   <a:srgbClr val="E5E0DF"/>
                 </a:solidFill>
@@ -5745,7 +5446,7 @@
           <a:bodyPr wrap="none" lIns="0" tIns="0" rIns="0" bIns="0" rtlCol="0" anchor="t"/>
           <a:lstStyle/>
           <a:p>
-            <a:pPr algn="l" indent="0" marL="0">
+            <a:pPr marL="0" indent="0" algn="l">
               <a:lnSpc>
                 <a:spcPct val="120000"/>
               </a:lnSpc>
@@ -5814,14 +5515,14 @@
           <a:bodyPr wrap="none" lIns="0" tIns="0" rIns="0" bIns="0" rtlCol="0" anchor="t"/>
           <a:lstStyle/>
           <a:p>
-            <a:pPr algn="l" indent="0" marL="0">
+            <a:pPr marL="0" indent="0" algn="l">
               <a:lnSpc>
                 <a:spcPct val="104000"/>
               </a:lnSpc>
               <a:buNone/>
             </a:pPr>
             <a:r>
-              <a:rPr lang="en-US" sz="1450" b="1" spc="-44" kern="0" dirty="0">
+              <a:rPr lang="en-US" sz="1450" b="1" kern="0" spc="-44" dirty="0">
                 <a:solidFill>
                   <a:srgbClr val="E5E0DF"/>
                 </a:solidFill>
@@ -5856,7 +5557,7 @@
           <a:bodyPr wrap="none" lIns="0" tIns="0" rIns="0" bIns="0" rtlCol="0" anchor="t"/>
           <a:lstStyle/>
           <a:p>
-            <a:pPr algn="l" indent="0" marL="0">
+            <a:pPr marL="0" indent="0" algn="l">
               <a:lnSpc>
                 <a:spcPct val="120000"/>
               </a:lnSpc>
@@ -5925,14 +5626,14 @@
           <a:bodyPr wrap="none" lIns="0" tIns="0" rIns="0" bIns="0" rtlCol="0" anchor="t"/>
           <a:lstStyle/>
           <a:p>
-            <a:pPr algn="l" indent="0" marL="0">
+            <a:pPr marL="0" indent="0" algn="l">
               <a:lnSpc>
                 <a:spcPct val="104000"/>
               </a:lnSpc>
               <a:buNone/>
             </a:pPr>
             <a:r>
-              <a:rPr lang="en-US" sz="1450" b="1" spc="-44" kern="0" dirty="0">
+              <a:rPr lang="en-US" sz="1450" b="1" kern="0" spc="-44" dirty="0">
                 <a:solidFill>
                   <a:srgbClr val="E5E0DF"/>
                 </a:solidFill>
@@ -5967,7 +5668,7 @@
           <a:bodyPr wrap="none" lIns="0" tIns="0" rIns="0" bIns="0" rtlCol="0" anchor="t"/>
           <a:lstStyle/>
           <a:p>
-            <a:pPr algn="l" indent="0" marL="0">
+            <a:pPr marL="0" indent="0" algn="l">
               <a:lnSpc>
                 <a:spcPct val="120000"/>
               </a:lnSpc>
@@ -6009,7 +5710,7 @@
           <a:bodyPr wrap="none" lIns="0" tIns="0" rIns="0" bIns="0" rtlCol="0" anchor="t"/>
           <a:lstStyle/>
           <a:p>
-            <a:pPr algn="l" indent="0" marL="0">
+            <a:pPr marL="0" indent="0" algn="l">
               <a:lnSpc>
                 <a:spcPct val="120000"/>
               </a:lnSpc>
@@ -6075,14 +5776,14 @@
           <a:bodyPr wrap="none" lIns="0" tIns="0" rIns="0" bIns="0" rtlCol="0" anchor="t"/>
           <a:lstStyle/>
           <a:p>
-            <a:pPr algn="l" indent="0" marL="0">
+            <a:pPr marL="0" indent="0" algn="l">
               <a:lnSpc>
                 <a:spcPct val="104000"/>
               </a:lnSpc>
               <a:buNone/>
             </a:pPr>
             <a:r>
-              <a:rPr lang="en-US" sz="2350" b="1" spc="-71" kern="0" dirty="0">
+              <a:rPr lang="en-US" sz="2350" b="1" kern="0" spc="-71" dirty="0">
                 <a:solidFill>
                   <a:srgbClr val="FFFFFF"/>
                 </a:solidFill>
@@ -6397,4 +6098,299 @@
     </a:ext>
   </a:extLst>
 </a:theme>
+</file>
+
+<file path=ppt/theme/theme2.xml><?xml version="1.0" encoding="utf-8"?>
+<a:theme xmlns:a="http://schemas.openxmlformats.org/drawingml/2006/main" name="Office Theme">
+  <a:themeElements>
+    <a:clrScheme name="Office">
+      <a:dk1>
+        <a:sysClr val="windowText" lastClr="000000"/>
+      </a:dk1>
+      <a:lt1>
+        <a:sysClr val="window" lastClr="FFFFFF"/>
+      </a:lt1>
+      <a:dk2>
+        <a:srgbClr val="44546A"/>
+      </a:dk2>
+      <a:lt2>
+        <a:srgbClr val="E7E6E6"/>
+      </a:lt2>
+      <a:accent1>
+        <a:srgbClr val="4472C4"/>
+      </a:accent1>
+      <a:accent2>
+        <a:srgbClr val="ED7D31"/>
+      </a:accent2>
+      <a:accent3>
+        <a:srgbClr val="A5A5A5"/>
+      </a:accent3>
+      <a:accent4>
+        <a:srgbClr val="FFC000"/>
+      </a:accent4>
+      <a:accent5>
+        <a:srgbClr val="5B9BD5"/>
+      </a:accent5>
+      <a:accent6>
+        <a:srgbClr val="70AD47"/>
+      </a:accent6>
+      <a:hlink>
+        <a:srgbClr val="0563C1"/>
+      </a:hlink>
+      <a:folHlink>
+        <a:srgbClr val="954F72"/>
+      </a:folHlink>
+    </a:clrScheme>
+    <a:fontScheme name="Office">
+      <a:majorFont>
+        <a:latin typeface="Calibri Light" panose="020F0302020204030204"/>
+        <a:ea typeface=""/>
+        <a:cs typeface=""/>
+        <a:font script="Jpan" typeface="游ゴシック Light"/>
+        <a:font script="Hang" typeface="맑은 고딕"/>
+        <a:font script="Hans" typeface="等线 Light"/>
+        <a:font script="Hant" typeface="新細明體"/>
+        <a:font script="Arab" typeface="Times New Roman"/>
+        <a:font script="Hebr" typeface="Times New Roman"/>
+        <a:font script="Thai" typeface="Angsana New"/>
+        <a:font script="Ethi" typeface="Nyala"/>
+        <a:font script="Beng" typeface="Vrinda"/>
+        <a:font script="Gujr" typeface="Shruti"/>
+        <a:font script="Khmr" typeface="MoolBoran"/>
+        <a:font script="Knda" typeface="Tunga"/>
+        <a:font script="Guru" typeface="Raavi"/>
+        <a:font script="Cans" typeface="Euphemia"/>
+        <a:font script="Cher" typeface="Plantagenet Cherokee"/>
+        <a:font script="Yiii" typeface="Microsoft Yi Baiti"/>
+        <a:font script="Tibt" typeface="Microsoft Himalaya"/>
+        <a:font script="Thaa" typeface="MV Boli"/>
+        <a:font script="Deva" typeface="Mangal"/>
+        <a:font script="Telu" typeface="Gautami"/>
+        <a:font script="Taml" typeface="Latha"/>
+        <a:font script="Syrc" typeface="Estrangelo Edessa"/>
+        <a:font script="Orya" typeface="Kalinga"/>
+        <a:font script="Mlym" typeface="Kartika"/>
+        <a:font script="Laoo" typeface="DokChampa"/>
+        <a:font script="Sinh" typeface="Iskoola Pota"/>
+        <a:font script="Mong" typeface="Mongolian Baiti"/>
+        <a:font script="Viet" typeface="Times New Roman"/>
+        <a:font script="Uigh" typeface="Microsoft Uighur"/>
+        <a:font script="Geor" typeface="Sylfaen"/>
+        <a:font script="Armn" typeface="Arial"/>
+        <a:font script="Bugi" typeface="Leelawadee UI"/>
+        <a:font script="Bopo" typeface="Microsoft JhengHei"/>
+        <a:font script="Java" typeface="Javanese Text"/>
+        <a:font script="Lisu" typeface="Segoe UI"/>
+        <a:font script="Mymr" typeface="Myanmar Text"/>
+        <a:font script="Nkoo" typeface="Ebrima"/>
+        <a:font script="Olck" typeface="Nirmala UI"/>
+        <a:font script="Osma" typeface="Ebrima"/>
+        <a:font script="Phag" typeface="Phagspa"/>
+        <a:font script="Syrn" typeface="Estrangelo Edessa"/>
+        <a:font script="Syrj" typeface="Estrangelo Edessa"/>
+        <a:font script="Syre" typeface="Estrangelo Edessa"/>
+        <a:font script="Sora" typeface="Nirmala UI"/>
+        <a:font script="Tale" typeface="Microsoft Tai Le"/>
+        <a:font script="Talu" typeface="Microsoft New Tai Lue"/>
+        <a:font script="Tfng" typeface="Ebrima"/>
+      </a:majorFont>
+      <a:minorFont>
+        <a:latin typeface="Calibri" panose="020F0502020204030204"/>
+        <a:ea typeface=""/>
+        <a:cs typeface=""/>
+        <a:font script="Jpan" typeface="游ゴシック"/>
+        <a:font script="Hang" typeface="맑은 고딕"/>
+        <a:font script="Hans" typeface="等线"/>
+        <a:font script="Hant" typeface="新細明體"/>
+        <a:font script="Arab" typeface="Arial"/>
+        <a:font script="Hebr" typeface="Arial"/>
+        <a:font script="Thai" typeface="Cordia New"/>
+        <a:font script="Ethi" typeface="Nyala"/>
+        <a:font script="Beng" typeface="Vrinda"/>
+        <a:font script="Gujr" typeface="Shruti"/>
+        <a:font script="Khmr" typeface="DaunPenh"/>
+        <a:font script="Knda" typeface="Tunga"/>
+        <a:font script="Guru" typeface="Raavi"/>
+        <a:font script="Cans" typeface="Euphemia"/>
+        <a:font script="Cher" typeface="Plantagenet Cherokee"/>
+        <a:font script="Yiii" typeface="Microsoft Yi Baiti"/>
+        <a:font script="Tibt" typeface="Microsoft Himalaya"/>
+        <a:font script="Thaa" typeface="MV Boli"/>
+        <a:font script="Deva" typeface="Mangal"/>
+        <a:font script="Telu" typeface="Gautami"/>
+        <a:font script="Taml" typeface="Latha"/>
+        <a:font script="Syrc" typeface="Estrangelo Edessa"/>
+        <a:font script="Orya" typeface="Kalinga"/>
+        <a:font script="Mlym" typeface="Kartika"/>
+        <a:font script="Laoo" typeface="DokChampa"/>
+        <a:font script="Sinh" typeface="Iskoola Pota"/>
+        <a:font script="Mong" typeface="Mongolian Baiti"/>
+        <a:font script="Viet" typeface="Arial"/>
+        <a:font script="Uigh" typeface="Microsoft Uighur"/>
+        <a:font script="Geor" typeface="Sylfaen"/>
+        <a:font script="Armn" typeface="Arial"/>
+        <a:font script="Bugi" typeface="Leelawadee UI"/>
+        <a:font script="Bopo" typeface="Microsoft JhengHei"/>
+        <a:font script="Java" typeface="Javanese Text"/>
+        <a:font script="Lisu" typeface="Segoe UI"/>
+        <a:font script="Mymr" typeface="Myanmar Text"/>
+        <a:font script="Nkoo" typeface="Ebrima"/>
+        <a:font script="Olck" typeface="Nirmala UI"/>
+        <a:font script="Osma" typeface="Ebrima"/>
+        <a:font script="Phag" typeface="Phagspa"/>
+        <a:font script="Syrn" typeface="Estrangelo Edessa"/>
+        <a:font script="Syrj" typeface="Estrangelo Edessa"/>
+        <a:font script="Syre" typeface="Estrangelo Edessa"/>
+        <a:font script="Sora" typeface="Nirmala UI"/>
+        <a:font script="Tale" typeface="Microsoft Tai Le"/>
+        <a:font script="Talu" typeface="Microsoft New Tai Lue"/>
+        <a:font script="Tfng" typeface="Ebrima"/>
+      </a:minorFont>
+    </a:fontScheme>
+    <a:fmtScheme name="Office">
+      <a:fillStyleLst>
+        <a:solidFill>
+          <a:schemeClr val="phClr"/>
+        </a:solidFill>
+        <a:gradFill rotWithShape="1">
+          <a:gsLst>
+            <a:gs pos="0">
+              <a:schemeClr val="phClr">
+                <a:lumMod val="110000"/>
+                <a:satMod val="105000"/>
+                <a:tint val="67000"/>
+              </a:schemeClr>
+            </a:gs>
+            <a:gs pos="50000">
+              <a:schemeClr val="phClr">
+                <a:lumMod val="105000"/>
+                <a:satMod val="103000"/>
+                <a:tint val="73000"/>
+              </a:schemeClr>
+            </a:gs>
+            <a:gs pos="100000">
+              <a:schemeClr val="phClr">
+                <a:lumMod val="105000"/>
+                <a:satMod val="109000"/>
+                <a:tint val="81000"/>
+              </a:schemeClr>
+            </a:gs>
+          </a:gsLst>
+          <a:lin ang="5400000" scaled="0"/>
+        </a:gradFill>
+        <a:gradFill rotWithShape="1">
+          <a:gsLst>
+            <a:gs pos="0">
+              <a:schemeClr val="phClr">
+                <a:satMod val="103000"/>
+                <a:lumMod val="102000"/>
+                <a:tint val="94000"/>
+              </a:schemeClr>
+            </a:gs>
+            <a:gs pos="50000">
+              <a:schemeClr val="phClr">
+                <a:satMod val="110000"/>
+                <a:lumMod val="100000"/>
+                <a:shade val="100000"/>
+              </a:schemeClr>
+            </a:gs>
+            <a:gs pos="100000">
+              <a:schemeClr val="phClr">
+                <a:lumMod val="99000"/>
+                <a:satMod val="120000"/>
+                <a:shade val="78000"/>
+              </a:schemeClr>
+            </a:gs>
+          </a:gsLst>
+          <a:lin ang="5400000" scaled="0"/>
+        </a:gradFill>
+      </a:fillStyleLst>
+      <a:lnStyleLst>
+        <a:ln w="6350" cap="flat" cmpd="sng" algn="ctr">
+          <a:solidFill>
+            <a:schemeClr val="phClr"/>
+          </a:solidFill>
+          <a:prstDash val="solid"/>
+          <a:miter lim="800000"/>
+        </a:ln>
+        <a:ln w="12700" cap="flat" cmpd="sng" algn="ctr">
+          <a:solidFill>
+            <a:schemeClr val="phClr"/>
+          </a:solidFill>
+          <a:prstDash val="solid"/>
+          <a:miter lim="800000"/>
+        </a:ln>
+        <a:ln w="19050" cap="flat" cmpd="sng" algn="ctr">
+          <a:solidFill>
+            <a:schemeClr val="phClr"/>
+          </a:solidFill>
+          <a:prstDash val="solid"/>
+          <a:miter lim="800000"/>
+        </a:ln>
+      </a:lnStyleLst>
+      <a:effectStyleLst>
+        <a:effectStyle>
+          <a:effectLst/>
+        </a:effectStyle>
+        <a:effectStyle>
+          <a:effectLst/>
+        </a:effectStyle>
+        <a:effectStyle>
+          <a:effectLst>
+            <a:outerShdw blurRad="57150" dist="19050" dir="5400000" algn="ctr" rotWithShape="0">
+              <a:srgbClr val="000000">
+                <a:alpha val="63000"/>
+              </a:srgbClr>
+            </a:outerShdw>
+          </a:effectLst>
+        </a:effectStyle>
+      </a:effectStyleLst>
+      <a:bgFillStyleLst>
+        <a:solidFill>
+          <a:schemeClr val="phClr"/>
+        </a:solidFill>
+        <a:solidFill>
+          <a:schemeClr val="phClr">
+            <a:tint val="95000"/>
+            <a:satMod val="170000"/>
+          </a:schemeClr>
+        </a:solidFill>
+        <a:gradFill rotWithShape="1">
+          <a:gsLst>
+            <a:gs pos="0">
+              <a:schemeClr val="phClr">
+                <a:tint val="93000"/>
+                <a:satMod val="150000"/>
+                <a:shade val="98000"/>
+                <a:lumMod val="102000"/>
+              </a:schemeClr>
+            </a:gs>
+            <a:gs pos="50000">
+              <a:schemeClr val="phClr">
+                <a:tint val="98000"/>
+                <a:satMod val="130000"/>
+                <a:shade val="90000"/>
+                <a:lumMod val="103000"/>
+              </a:schemeClr>
+            </a:gs>
+            <a:gs pos="100000">
+              <a:schemeClr val="phClr">
+                <a:shade val="63000"/>
+                <a:satMod val="120000"/>
+              </a:schemeClr>
+            </a:gs>
+          </a:gsLst>
+          <a:lin ang="5400000" scaled="0"/>
+        </a:gradFill>
+      </a:bgFillStyleLst>
+    </a:fmtScheme>
+  </a:themeElements>
+  <a:objectDefaults/>
+  <a:extraClrSchemeLst/>
+  <a:extLst>
+    <a:ext uri="{05A4C25C-085E-4340-85A3-A5531E510DB2}">
+      <thm15:themeFamily xmlns:thm15="http://schemas.microsoft.com/office/thememl/2012/main" name="Office Theme" id="{62F939B6-93AF-4DB8-9C6B-D6C7DFDC589F}" vid="{4A3C46E8-61CC-4603-A589-7422A47A8E4A}"/>
+    </a:ext>
+  </a:extLst>
+</a:theme>
 </file>